--- a/docs/Career-Application-Agent-Quick-Overview.pptx
+++ b/docs/Career-Application-Agent-Quick-Overview.pptx
@@ -13,16 +13,16 @@
     <p:sldId id="258" r:id="rId7"/>
     <p:sldId id="259" r:id="rId8"/>
     <p:sldId id="260" r:id="rId9"/>
-    <p:sldId id="261" r:id="rId13"/>
-    <p:sldId id="262" r:id="rId14"/>
+    <p:sldId id="261" r:id="rId10"/>
+    <p:sldId id="262" r:id="rId11"/>
   </p:sldIdLst>
   <p:sldSz cy="6858000" cx="12191675"/>
   <p:notesSz cx="6858000" cy="12191675"/>
   <p:embeddedFontLst>
     <p:embeddedFont>
       <p:font typeface="Play"/>
-      <p:regular r:id="rId10"/>
-      <p:bold r:id="rId11"/>
+      <p:regular r:id="rId12"/>
+      <p:bold r:id="rId13"/>
     </p:embeddedFont>
   </p:embeddedFontLst>
   <p:defaultTextStyle>
@@ -256,7 +256,7 @@
   </p:defaultTextStyle>
   <p:extLst>
     <p:ext uri="GoogleSlidesCustomDataVersion2">
-      <go:slidesCustomData xmlns:go="http://customooxmlschemas.google.com/" r:id="rId12" roundtripDataSignature="AMtx7miGhvqOqQuJ+CLwDFs/Mup+LlydFg=="/>
+      <go:slidesCustomData xmlns:go="http://customooxmlschemas.google.com/" r:id="rId14" roundtripDataSignature="AMtx7mjvJSQQnzd45ZmLJf0nfmqiDH610g=="/>
     </p:ext>
   </p:extLst>
 </p:presentation>
@@ -313,13 +313,20 @@
           </a:bodyPr>
           <a:lstStyle>
             <a:lvl1pPr lvl="0" marR="0" rtl="0" algn="l">
-              <a:spcBef>
-                <a:spcPts val="0"/>
-              </a:spcBef>
-              <a:spcAft>
-                <a:spcPts val="0"/>
-              </a:spcAft>
+              <a:lnSpc>
+                <a:spcPct val="100000"/>
+              </a:lnSpc>
+              <a:spcBef>
+                <a:spcPts val="0"/>
+              </a:spcBef>
+              <a:spcAft>
+                <a:spcPts val="0"/>
+              </a:spcAft>
+              <a:buClr>
+                <a:srgbClr val="000000"/>
+              </a:buClr>
               <a:buSzPts val="1400"/>
+              <a:buFont typeface="Arial"/>
               <a:buNone/>
               <a:defRPr b="0" i="0" sz="1200" u="none" cap="none" strike="noStrike">
                 <a:solidFill>
@@ -332,13 +339,20 @@
               </a:defRPr>
             </a:lvl1pPr>
             <a:lvl2pPr lvl="1" marR="0" rtl="0" algn="l">
-              <a:spcBef>
-                <a:spcPts val="0"/>
-              </a:spcBef>
-              <a:spcAft>
-                <a:spcPts val="0"/>
-              </a:spcAft>
+              <a:lnSpc>
+                <a:spcPct val="100000"/>
+              </a:lnSpc>
+              <a:spcBef>
+                <a:spcPts val="0"/>
+              </a:spcBef>
+              <a:spcAft>
+                <a:spcPts val="0"/>
+              </a:spcAft>
+              <a:buClr>
+                <a:srgbClr val="000000"/>
+              </a:buClr>
               <a:buSzPts val="1400"/>
+              <a:buFont typeface="Arial"/>
               <a:buNone/>
               <a:defRPr b="0" i="0" sz="1800" u="none" cap="none" strike="noStrike">
                 <a:solidFill>
@@ -351,13 +365,20 @@
               </a:defRPr>
             </a:lvl2pPr>
             <a:lvl3pPr lvl="2" marR="0" rtl="0" algn="l">
-              <a:spcBef>
-                <a:spcPts val="0"/>
-              </a:spcBef>
-              <a:spcAft>
-                <a:spcPts val="0"/>
-              </a:spcAft>
+              <a:lnSpc>
+                <a:spcPct val="100000"/>
+              </a:lnSpc>
+              <a:spcBef>
+                <a:spcPts val="0"/>
+              </a:spcBef>
+              <a:spcAft>
+                <a:spcPts val="0"/>
+              </a:spcAft>
+              <a:buClr>
+                <a:srgbClr val="000000"/>
+              </a:buClr>
               <a:buSzPts val="1400"/>
+              <a:buFont typeface="Arial"/>
               <a:buNone/>
               <a:defRPr b="0" i="0" sz="1800" u="none" cap="none" strike="noStrike">
                 <a:solidFill>
@@ -370,13 +391,20 @@
               </a:defRPr>
             </a:lvl3pPr>
             <a:lvl4pPr lvl="3" marR="0" rtl="0" algn="l">
-              <a:spcBef>
-                <a:spcPts val="0"/>
-              </a:spcBef>
-              <a:spcAft>
-                <a:spcPts val="0"/>
-              </a:spcAft>
+              <a:lnSpc>
+                <a:spcPct val="100000"/>
+              </a:lnSpc>
+              <a:spcBef>
+                <a:spcPts val="0"/>
+              </a:spcBef>
+              <a:spcAft>
+                <a:spcPts val="0"/>
+              </a:spcAft>
+              <a:buClr>
+                <a:srgbClr val="000000"/>
+              </a:buClr>
               <a:buSzPts val="1400"/>
+              <a:buFont typeface="Arial"/>
               <a:buNone/>
               <a:defRPr b="0" i="0" sz="1800" u="none" cap="none" strike="noStrike">
                 <a:solidFill>
@@ -389,13 +417,20 @@
               </a:defRPr>
             </a:lvl4pPr>
             <a:lvl5pPr lvl="4" marR="0" rtl="0" algn="l">
-              <a:spcBef>
-                <a:spcPts val="0"/>
-              </a:spcBef>
-              <a:spcAft>
-                <a:spcPts val="0"/>
-              </a:spcAft>
+              <a:lnSpc>
+                <a:spcPct val="100000"/>
+              </a:lnSpc>
+              <a:spcBef>
+                <a:spcPts val="0"/>
+              </a:spcBef>
+              <a:spcAft>
+                <a:spcPts val="0"/>
+              </a:spcAft>
+              <a:buClr>
+                <a:srgbClr val="000000"/>
+              </a:buClr>
               <a:buSzPts val="1400"/>
+              <a:buFont typeface="Arial"/>
               <a:buNone/>
               <a:defRPr b="0" i="0" sz="1800" u="none" cap="none" strike="noStrike">
                 <a:solidFill>
@@ -408,13 +443,20 @@
               </a:defRPr>
             </a:lvl5pPr>
             <a:lvl6pPr lvl="5" marR="0" rtl="0" algn="l">
-              <a:spcBef>
-                <a:spcPts val="0"/>
-              </a:spcBef>
-              <a:spcAft>
-                <a:spcPts val="0"/>
-              </a:spcAft>
+              <a:lnSpc>
+                <a:spcPct val="100000"/>
+              </a:lnSpc>
+              <a:spcBef>
+                <a:spcPts val="0"/>
+              </a:spcBef>
+              <a:spcAft>
+                <a:spcPts val="0"/>
+              </a:spcAft>
+              <a:buClr>
+                <a:srgbClr val="000000"/>
+              </a:buClr>
               <a:buSzPts val="1400"/>
+              <a:buFont typeface="Arial"/>
               <a:buNone/>
               <a:defRPr b="0" i="0" sz="1800" u="none" cap="none" strike="noStrike">
                 <a:solidFill>
@@ -427,13 +469,20 @@
               </a:defRPr>
             </a:lvl6pPr>
             <a:lvl7pPr lvl="6" marR="0" rtl="0" algn="l">
-              <a:spcBef>
-                <a:spcPts val="0"/>
-              </a:spcBef>
-              <a:spcAft>
-                <a:spcPts val="0"/>
-              </a:spcAft>
+              <a:lnSpc>
+                <a:spcPct val="100000"/>
+              </a:lnSpc>
+              <a:spcBef>
+                <a:spcPts val="0"/>
+              </a:spcBef>
+              <a:spcAft>
+                <a:spcPts val="0"/>
+              </a:spcAft>
+              <a:buClr>
+                <a:srgbClr val="000000"/>
+              </a:buClr>
               <a:buSzPts val="1400"/>
+              <a:buFont typeface="Arial"/>
               <a:buNone/>
               <a:defRPr b="0" i="0" sz="1800" u="none" cap="none" strike="noStrike">
                 <a:solidFill>
@@ -446,13 +495,20 @@
               </a:defRPr>
             </a:lvl7pPr>
             <a:lvl8pPr lvl="7" marR="0" rtl="0" algn="l">
-              <a:spcBef>
-                <a:spcPts val="0"/>
-              </a:spcBef>
-              <a:spcAft>
-                <a:spcPts val="0"/>
-              </a:spcAft>
+              <a:lnSpc>
+                <a:spcPct val="100000"/>
+              </a:lnSpc>
+              <a:spcBef>
+                <a:spcPts val="0"/>
+              </a:spcBef>
+              <a:spcAft>
+                <a:spcPts val="0"/>
+              </a:spcAft>
+              <a:buClr>
+                <a:srgbClr val="000000"/>
+              </a:buClr>
               <a:buSzPts val="1400"/>
+              <a:buFont typeface="Arial"/>
               <a:buNone/>
               <a:defRPr b="0" i="0" sz="1800" u="none" cap="none" strike="noStrike">
                 <a:solidFill>
@@ -465,13 +521,20 @@
               </a:defRPr>
             </a:lvl8pPr>
             <a:lvl9pPr lvl="8" marR="0" rtl="0" algn="l">
-              <a:spcBef>
-                <a:spcPts val="0"/>
-              </a:spcBef>
-              <a:spcAft>
-                <a:spcPts val="0"/>
-              </a:spcAft>
+              <a:lnSpc>
+                <a:spcPct val="100000"/>
+              </a:lnSpc>
+              <a:spcBef>
+                <a:spcPts val="0"/>
+              </a:spcBef>
+              <a:spcAft>
+                <a:spcPts val="0"/>
+              </a:spcAft>
+              <a:buClr>
+                <a:srgbClr val="000000"/>
+              </a:buClr>
               <a:buSzPts val="1400"/>
+              <a:buFont typeface="Arial"/>
               <a:buNone/>
               <a:defRPr b="0" i="0" sz="1800" u="none" cap="none" strike="noStrike">
                 <a:solidFill>
@@ -514,13 +577,20 @@
           </a:bodyPr>
           <a:lstStyle>
             <a:lvl1pPr lvl="0" marR="0" rtl="0" algn="r">
-              <a:spcBef>
-                <a:spcPts val="0"/>
-              </a:spcBef>
-              <a:spcAft>
-                <a:spcPts val="0"/>
-              </a:spcAft>
+              <a:lnSpc>
+                <a:spcPct val="100000"/>
+              </a:lnSpc>
+              <a:spcBef>
+                <a:spcPts val="0"/>
+              </a:spcBef>
+              <a:spcAft>
+                <a:spcPts val="0"/>
+              </a:spcAft>
+              <a:buClr>
+                <a:srgbClr val="000000"/>
+              </a:buClr>
               <a:buSzPts val="1400"/>
+              <a:buFont typeface="Arial"/>
               <a:buNone/>
               <a:defRPr b="0" i="0" sz="1200" u="none" cap="none" strike="noStrike">
                 <a:solidFill>
@@ -533,13 +603,20 @@
               </a:defRPr>
             </a:lvl1pPr>
             <a:lvl2pPr lvl="1" marR="0" rtl="0" algn="l">
-              <a:spcBef>
-                <a:spcPts val="0"/>
-              </a:spcBef>
-              <a:spcAft>
-                <a:spcPts val="0"/>
-              </a:spcAft>
+              <a:lnSpc>
+                <a:spcPct val="100000"/>
+              </a:lnSpc>
+              <a:spcBef>
+                <a:spcPts val="0"/>
+              </a:spcBef>
+              <a:spcAft>
+                <a:spcPts val="0"/>
+              </a:spcAft>
+              <a:buClr>
+                <a:srgbClr val="000000"/>
+              </a:buClr>
               <a:buSzPts val="1400"/>
+              <a:buFont typeface="Arial"/>
               <a:buNone/>
               <a:defRPr b="0" i="0" sz="1800" u="none" cap="none" strike="noStrike">
                 <a:solidFill>
@@ -552,13 +629,20 @@
               </a:defRPr>
             </a:lvl2pPr>
             <a:lvl3pPr lvl="2" marR="0" rtl="0" algn="l">
-              <a:spcBef>
-                <a:spcPts val="0"/>
-              </a:spcBef>
-              <a:spcAft>
-                <a:spcPts val="0"/>
-              </a:spcAft>
+              <a:lnSpc>
+                <a:spcPct val="100000"/>
+              </a:lnSpc>
+              <a:spcBef>
+                <a:spcPts val="0"/>
+              </a:spcBef>
+              <a:spcAft>
+                <a:spcPts val="0"/>
+              </a:spcAft>
+              <a:buClr>
+                <a:srgbClr val="000000"/>
+              </a:buClr>
               <a:buSzPts val="1400"/>
+              <a:buFont typeface="Arial"/>
               <a:buNone/>
               <a:defRPr b="0" i="0" sz="1800" u="none" cap="none" strike="noStrike">
                 <a:solidFill>
@@ -571,13 +655,20 @@
               </a:defRPr>
             </a:lvl3pPr>
             <a:lvl4pPr lvl="3" marR="0" rtl="0" algn="l">
-              <a:spcBef>
-                <a:spcPts val="0"/>
-              </a:spcBef>
-              <a:spcAft>
-                <a:spcPts val="0"/>
-              </a:spcAft>
+              <a:lnSpc>
+                <a:spcPct val="100000"/>
+              </a:lnSpc>
+              <a:spcBef>
+                <a:spcPts val="0"/>
+              </a:spcBef>
+              <a:spcAft>
+                <a:spcPts val="0"/>
+              </a:spcAft>
+              <a:buClr>
+                <a:srgbClr val="000000"/>
+              </a:buClr>
               <a:buSzPts val="1400"/>
+              <a:buFont typeface="Arial"/>
               <a:buNone/>
               <a:defRPr b="0" i="0" sz="1800" u="none" cap="none" strike="noStrike">
                 <a:solidFill>
@@ -590,13 +681,20 @@
               </a:defRPr>
             </a:lvl4pPr>
             <a:lvl5pPr lvl="4" marR="0" rtl="0" algn="l">
-              <a:spcBef>
-                <a:spcPts val="0"/>
-              </a:spcBef>
-              <a:spcAft>
-                <a:spcPts val="0"/>
-              </a:spcAft>
+              <a:lnSpc>
+                <a:spcPct val="100000"/>
+              </a:lnSpc>
+              <a:spcBef>
+                <a:spcPts val="0"/>
+              </a:spcBef>
+              <a:spcAft>
+                <a:spcPts val="0"/>
+              </a:spcAft>
+              <a:buClr>
+                <a:srgbClr val="000000"/>
+              </a:buClr>
               <a:buSzPts val="1400"/>
+              <a:buFont typeface="Arial"/>
               <a:buNone/>
               <a:defRPr b="0" i="0" sz="1800" u="none" cap="none" strike="noStrike">
                 <a:solidFill>
@@ -609,13 +707,20 @@
               </a:defRPr>
             </a:lvl5pPr>
             <a:lvl6pPr lvl="5" marR="0" rtl="0" algn="l">
-              <a:spcBef>
-                <a:spcPts val="0"/>
-              </a:spcBef>
-              <a:spcAft>
-                <a:spcPts val="0"/>
-              </a:spcAft>
+              <a:lnSpc>
+                <a:spcPct val="100000"/>
+              </a:lnSpc>
+              <a:spcBef>
+                <a:spcPts val="0"/>
+              </a:spcBef>
+              <a:spcAft>
+                <a:spcPts val="0"/>
+              </a:spcAft>
+              <a:buClr>
+                <a:srgbClr val="000000"/>
+              </a:buClr>
               <a:buSzPts val="1400"/>
+              <a:buFont typeface="Arial"/>
               <a:buNone/>
               <a:defRPr b="0" i="0" sz="1800" u="none" cap="none" strike="noStrike">
                 <a:solidFill>
@@ -628,13 +733,20 @@
               </a:defRPr>
             </a:lvl6pPr>
             <a:lvl7pPr lvl="6" marR="0" rtl="0" algn="l">
-              <a:spcBef>
-                <a:spcPts val="0"/>
-              </a:spcBef>
-              <a:spcAft>
-                <a:spcPts val="0"/>
-              </a:spcAft>
+              <a:lnSpc>
+                <a:spcPct val="100000"/>
+              </a:lnSpc>
+              <a:spcBef>
+                <a:spcPts val="0"/>
+              </a:spcBef>
+              <a:spcAft>
+                <a:spcPts val="0"/>
+              </a:spcAft>
+              <a:buClr>
+                <a:srgbClr val="000000"/>
+              </a:buClr>
               <a:buSzPts val="1400"/>
+              <a:buFont typeface="Arial"/>
               <a:buNone/>
               <a:defRPr b="0" i="0" sz="1800" u="none" cap="none" strike="noStrike">
                 <a:solidFill>
@@ -647,13 +759,20 @@
               </a:defRPr>
             </a:lvl7pPr>
             <a:lvl8pPr lvl="7" marR="0" rtl="0" algn="l">
-              <a:spcBef>
-                <a:spcPts val="0"/>
-              </a:spcBef>
-              <a:spcAft>
-                <a:spcPts val="0"/>
-              </a:spcAft>
+              <a:lnSpc>
+                <a:spcPct val="100000"/>
+              </a:lnSpc>
+              <a:spcBef>
+                <a:spcPts val="0"/>
+              </a:spcBef>
+              <a:spcAft>
+                <a:spcPts val="0"/>
+              </a:spcAft>
+              <a:buClr>
+                <a:srgbClr val="000000"/>
+              </a:buClr>
               <a:buSzPts val="1400"/>
+              <a:buFont typeface="Arial"/>
               <a:buNone/>
               <a:defRPr b="0" i="0" sz="1800" u="none" cap="none" strike="noStrike">
                 <a:solidFill>
@@ -666,13 +785,20 @@
               </a:defRPr>
             </a:lvl8pPr>
             <a:lvl9pPr lvl="8" marR="0" rtl="0" algn="l">
-              <a:spcBef>
-                <a:spcPts val="0"/>
-              </a:spcBef>
-              <a:spcAft>
-                <a:spcPts val="0"/>
-              </a:spcAft>
+              <a:lnSpc>
+                <a:spcPct val="100000"/>
+              </a:lnSpc>
+              <a:spcBef>
+                <a:spcPts val="0"/>
+              </a:spcBef>
+              <a:spcAft>
+                <a:spcPts val="0"/>
+              </a:spcAft>
+              <a:buClr>
+                <a:srgbClr val="000000"/>
+              </a:buClr>
               <a:buSzPts val="1400"/>
+              <a:buFont typeface="Arial"/>
               <a:buNone/>
               <a:defRPr b="0" i="0" sz="1800" u="none" cap="none" strike="noStrike">
                 <a:solidFill>
@@ -760,13 +886,20 @@
           </a:bodyPr>
           <a:lstStyle>
             <a:lvl1pPr indent="-228600" lvl="0" marL="457200" marR="0" rtl="0" algn="l">
-              <a:spcBef>
-                <a:spcPts val="0"/>
-              </a:spcBef>
-              <a:spcAft>
-                <a:spcPts val="0"/>
-              </a:spcAft>
+              <a:lnSpc>
+                <a:spcPct val="100000"/>
+              </a:lnSpc>
+              <a:spcBef>
+                <a:spcPts val="0"/>
+              </a:spcBef>
+              <a:spcAft>
+                <a:spcPts val="0"/>
+              </a:spcAft>
+              <a:buClr>
+                <a:srgbClr val="000000"/>
+              </a:buClr>
               <a:buSzPts val="1400"/>
+              <a:buFont typeface="Arial"/>
               <a:buNone/>
               <a:defRPr b="0" i="0" sz="1200" u="none" cap="none" strike="noStrike">
                 <a:solidFill>
@@ -779,13 +912,20 @@
               </a:defRPr>
             </a:lvl1pPr>
             <a:lvl2pPr indent="-228600" lvl="1" marL="914400" marR="0" rtl="0" algn="l">
-              <a:spcBef>
-                <a:spcPts val="0"/>
-              </a:spcBef>
-              <a:spcAft>
-                <a:spcPts val="0"/>
-              </a:spcAft>
+              <a:lnSpc>
+                <a:spcPct val="100000"/>
+              </a:lnSpc>
+              <a:spcBef>
+                <a:spcPts val="0"/>
+              </a:spcBef>
+              <a:spcAft>
+                <a:spcPts val="0"/>
+              </a:spcAft>
+              <a:buClr>
+                <a:srgbClr val="000000"/>
+              </a:buClr>
               <a:buSzPts val="1400"/>
+              <a:buFont typeface="Arial"/>
               <a:buNone/>
               <a:defRPr b="0" i="0" sz="1200" u="none" cap="none" strike="noStrike">
                 <a:solidFill>
@@ -798,13 +938,20 @@
               </a:defRPr>
             </a:lvl2pPr>
             <a:lvl3pPr indent="-228600" lvl="2" marL="1371600" marR="0" rtl="0" algn="l">
-              <a:spcBef>
-                <a:spcPts val="0"/>
-              </a:spcBef>
-              <a:spcAft>
-                <a:spcPts val="0"/>
-              </a:spcAft>
+              <a:lnSpc>
+                <a:spcPct val="100000"/>
+              </a:lnSpc>
+              <a:spcBef>
+                <a:spcPts val="0"/>
+              </a:spcBef>
+              <a:spcAft>
+                <a:spcPts val="0"/>
+              </a:spcAft>
+              <a:buClr>
+                <a:srgbClr val="000000"/>
+              </a:buClr>
               <a:buSzPts val="1400"/>
+              <a:buFont typeface="Arial"/>
               <a:buNone/>
               <a:defRPr b="0" i="0" sz="1200" u="none" cap="none" strike="noStrike">
                 <a:solidFill>
@@ -817,13 +964,20 @@
               </a:defRPr>
             </a:lvl3pPr>
             <a:lvl4pPr indent="-228600" lvl="3" marL="1828800" marR="0" rtl="0" algn="l">
-              <a:spcBef>
-                <a:spcPts val="0"/>
-              </a:spcBef>
-              <a:spcAft>
-                <a:spcPts val="0"/>
-              </a:spcAft>
+              <a:lnSpc>
+                <a:spcPct val="100000"/>
+              </a:lnSpc>
+              <a:spcBef>
+                <a:spcPts val="0"/>
+              </a:spcBef>
+              <a:spcAft>
+                <a:spcPts val="0"/>
+              </a:spcAft>
+              <a:buClr>
+                <a:srgbClr val="000000"/>
+              </a:buClr>
               <a:buSzPts val="1400"/>
+              <a:buFont typeface="Arial"/>
               <a:buNone/>
               <a:defRPr b="0" i="0" sz="1200" u="none" cap="none" strike="noStrike">
                 <a:solidFill>
@@ -836,13 +990,20 @@
               </a:defRPr>
             </a:lvl4pPr>
             <a:lvl5pPr indent="-228600" lvl="4" marL="2286000" marR="0" rtl="0" algn="l">
-              <a:spcBef>
-                <a:spcPts val="0"/>
-              </a:spcBef>
-              <a:spcAft>
-                <a:spcPts val="0"/>
-              </a:spcAft>
+              <a:lnSpc>
+                <a:spcPct val="100000"/>
+              </a:lnSpc>
+              <a:spcBef>
+                <a:spcPts val="0"/>
+              </a:spcBef>
+              <a:spcAft>
+                <a:spcPts val="0"/>
+              </a:spcAft>
+              <a:buClr>
+                <a:srgbClr val="000000"/>
+              </a:buClr>
               <a:buSzPts val="1400"/>
+              <a:buFont typeface="Arial"/>
               <a:buNone/>
               <a:defRPr b="0" i="0" sz="1200" u="none" cap="none" strike="noStrike">
                 <a:solidFill>
@@ -855,13 +1016,20 @@
               </a:defRPr>
             </a:lvl5pPr>
             <a:lvl6pPr indent="-228600" lvl="5" marL="2743200" marR="0" rtl="0" algn="l">
-              <a:spcBef>
-                <a:spcPts val="0"/>
-              </a:spcBef>
-              <a:spcAft>
-                <a:spcPts val="0"/>
-              </a:spcAft>
+              <a:lnSpc>
+                <a:spcPct val="100000"/>
+              </a:lnSpc>
+              <a:spcBef>
+                <a:spcPts val="0"/>
+              </a:spcBef>
+              <a:spcAft>
+                <a:spcPts val="0"/>
+              </a:spcAft>
+              <a:buClr>
+                <a:srgbClr val="000000"/>
+              </a:buClr>
               <a:buSzPts val="1400"/>
+              <a:buFont typeface="Arial"/>
               <a:buNone/>
               <a:defRPr b="0" i="0" sz="1200" u="none" cap="none" strike="noStrike">
                 <a:solidFill>
@@ -874,13 +1042,20 @@
               </a:defRPr>
             </a:lvl6pPr>
             <a:lvl7pPr indent="-228600" lvl="6" marL="3200400" marR="0" rtl="0" algn="l">
-              <a:spcBef>
-                <a:spcPts val="0"/>
-              </a:spcBef>
-              <a:spcAft>
-                <a:spcPts val="0"/>
-              </a:spcAft>
+              <a:lnSpc>
+                <a:spcPct val="100000"/>
+              </a:lnSpc>
+              <a:spcBef>
+                <a:spcPts val="0"/>
+              </a:spcBef>
+              <a:spcAft>
+                <a:spcPts val="0"/>
+              </a:spcAft>
+              <a:buClr>
+                <a:srgbClr val="000000"/>
+              </a:buClr>
               <a:buSzPts val="1400"/>
+              <a:buFont typeface="Arial"/>
               <a:buNone/>
               <a:defRPr b="0" i="0" sz="1200" u="none" cap="none" strike="noStrike">
                 <a:solidFill>
@@ -893,13 +1068,20 @@
               </a:defRPr>
             </a:lvl7pPr>
             <a:lvl8pPr indent="-228600" lvl="7" marL="3657600" marR="0" rtl="0" algn="l">
-              <a:spcBef>
-                <a:spcPts val="0"/>
-              </a:spcBef>
-              <a:spcAft>
-                <a:spcPts val="0"/>
-              </a:spcAft>
+              <a:lnSpc>
+                <a:spcPct val="100000"/>
+              </a:lnSpc>
+              <a:spcBef>
+                <a:spcPts val="0"/>
+              </a:spcBef>
+              <a:spcAft>
+                <a:spcPts val="0"/>
+              </a:spcAft>
+              <a:buClr>
+                <a:srgbClr val="000000"/>
+              </a:buClr>
               <a:buSzPts val="1400"/>
+              <a:buFont typeface="Arial"/>
               <a:buNone/>
               <a:defRPr b="0" i="0" sz="1200" u="none" cap="none" strike="noStrike">
                 <a:solidFill>
@@ -912,13 +1094,20 @@
               </a:defRPr>
             </a:lvl8pPr>
             <a:lvl9pPr indent="-228600" lvl="8" marL="4114800" marR="0" rtl="0" algn="l">
-              <a:spcBef>
-                <a:spcPts val="0"/>
-              </a:spcBef>
-              <a:spcAft>
-                <a:spcPts val="0"/>
-              </a:spcAft>
+              <a:lnSpc>
+                <a:spcPct val="100000"/>
+              </a:lnSpc>
+              <a:spcBef>
+                <a:spcPts val="0"/>
+              </a:spcBef>
+              <a:spcAft>
+                <a:spcPts val="0"/>
+              </a:spcAft>
+              <a:buClr>
+                <a:srgbClr val="000000"/>
+              </a:buClr>
               <a:buSzPts val="1400"/>
+              <a:buFont typeface="Arial"/>
               <a:buNone/>
               <a:defRPr b="0" i="0" sz="1200" u="none" cap="none" strike="noStrike">
                 <a:solidFill>
@@ -961,13 +1150,20 @@
           </a:bodyPr>
           <a:lstStyle>
             <a:lvl1pPr lvl="0" marR="0" rtl="0" algn="l">
-              <a:spcBef>
-                <a:spcPts val="0"/>
-              </a:spcBef>
-              <a:spcAft>
-                <a:spcPts val="0"/>
-              </a:spcAft>
+              <a:lnSpc>
+                <a:spcPct val="100000"/>
+              </a:lnSpc>
+              <a:spcBef>
+                <a:spcPts val="0"/>
+              </a:spcBef>
+              <a:spcAft>
+                <a:spcPts val="0"/>
+              </a:spcAft>
+              <a:buClr>
+                <a:srgbClr val="000000"/>
+              </a:buClr>
               <a:buSzPts val="1400"/>
+              <a:buFont typeface="Arial"/>
               <a:buNone/>
               <a:defRPr b="0" i="0" sz="1200" u="none" cap="none" strike="noStrike">
                 <a:solidFill>
@@ -980,13 +1176,20 @@
               </a:defRPr>
             </a:lvl1pPr>
             <a:lvl2pPr lvl="1" marR="0" rtl="0" algn="l">
-              <a:spcBef>
-                <a:spcPts val="0"/>
-              </a:spcBef>
-              <a:spcAft>
-                <a:spcPts val="0"/>
-              </a:spcAft>
+              <a:lnSpc>
+                <a:spcPct val="100000"/>
+              </a:lnSpc>
+              <a:spcBef>
+                <a:spcPts val="0"/>
+              </a:spcBef>
+              <a:spcAft>
+                <a:spcPts val="0"/>
+              </a:spcAft>
+              <a:buClr>
+                <a:srgbClr val="000000"/>
+              </a:buClr>
               <a:buSzPts val="1400"/>
+              <a:buFont typeface="Arial"/>
               <a:buNone/>
               <a:defRPr b="0" i="0" sz="1800" u="none" cap="none" strike="noStrike">
                 <a:solidFill>
@@ -999,13 +1202,20 @@
               </a:defRPr>
             </a:lvl2pPr>
             <a:lvl3pPr lvl="2" marR="0" rtl="0" algn="l">
-              <a:spcBef>
-                <a:spcPts val="0"/>
-              </a:spcBef>
-              <a:spcAft>
-                <a:spcPts val="0"/>
-              </a:spcAft>
+              <a:lnSpc>
+                <a:spcPct val="100000"/>
+              </a:lnSpc>
+              <a:spcBef>
+                <a:spcPts val="0"/>
+              </a:spcBef>
+              <a:spcAft>
+                <a:spcPts val="0"/>
+              </a:spcAft>
+              <a:buClr>
+                <a:srgbClr val="000000"/>
+              </a:buClr>
               <a:buSzPts val="1400"/>
+              <a:buFont typeface="Arial"/>
               <a:buNone/>
               <a:defRPr b="0" i="0" sz="1800" u="none" cap="none" strike="noStrike">
                 <a:solidFill>
@@ -1018,13 +1228,20 @@
               </a:defRPr>
             </a:lvl3pPr>
             <a:lvl4pPr lvl="3" marR="0" rtl="0" algn="l">
-              <a:spcBef>
-                <a:spcPts val="0"/>
-              </a:spcBef>
-              <a:spcAft>
-                <a:spcPts val="0"/>
-              </a:spcAft>
+              <a:lnSpc>
+                <a:spcPct val="100000"/>
+              </a:lnSpc>
+              <a:spcBef>
+                <a:spcPts val="0"/>
+              </a:spcBef>
+              <a:spcAft>
+                <a:spcPts val="0"/>
+              </a:spcAft>
+              <a:buClr>
+                <a:srgbClr val="000000"/>
+              </a:buClr>
               <a:buSzPts val="1400"/>
+              <a:buFont typeface="Arial"/>
               <a:buNone/>
               <a:defRPr b="0" i="0" sz="1800" u="none" cap="none" strike="noStrike">
                 <a:solidFill>
@@ -1037,13 +1254,20 @@
               </a:defRPr>
             </a:lvl4pPr>
             <a:lvl5pPr lvl="4" marR="0" rtl="0" algn="l">
-              <a:spcBef>
-                <a:spcPts val="0"/>
-              </a:spcBef>
-              <a:spcAft>
-                <a:spcPts val="0"/>
-              </a:spcAft>
+              <a:lnSpc>
+                <a:spcPct val="100000"/>
+              </a:lnSpc>
+              <a:spcBef>
+                <a:spcPts val="0"/>
+              </a:spcBef>
+              <a:spcAft>
+                <a:spcPts val="0"/>
+              </a:spcAft>
+              <a:buClr>
+                <a:srgbClr val="000000"/>
+              </a:buClr>
               <a:buSzPts val="1400"/>
+              <a:buFont typeface="Arial"/>
               <a:buNone/>
               <a:defRPr b="0" i="0" sz="1800" u="none" cap="none" strike="noStrike">
                 <a:solidFill>
@@ -1056,13 +1280,20 @@
               </a:defRPr>
             </a:lvl5pPr>
             <a:lvl6pPr lvl="5" marR="0" rtl="0" algn="l">
-              <a:spcBef>
-                <a:spcPts val="0"/>
-              </a:spcBef>
-              <a:spcAft>
-                <a:spcPts val="0"/>
-              </a:spcAft>
+              <a:lnSpc>
+                <a:spcPct val="100000"/>
+              </a:lnSpc>
+              <a:spcBef>
+                <a:spcPts val="0"/>
+              </a:spcBef>
+              <a:spcAft>
+                <a:spcPts val="0"/>
+              </a:spcAft>
+              <a:buClr>
+                <a:srgbClr val="000000"/>
+              </a:buClr>
               <a:buSzPts val="1400"/>
+              <a:buFont typeface="Arial"/>
               <a:buNone/>
               <a:defRPr b="0" i="0" sz="1800" u="none" cap="none" strike="noStrike">
                 <a:solidFill>
@@ -1075,13 +1306,20 @@
               </a:defRPr>
             </a:lvl6pPr>
             <a:lvl7pPr lvl="6" marR="0" rtl="0" algn="l">
-              <a:spcBef>
-                <a:spcPts val="0"/>
-              </a:spcBef>
-              <a:spcAft>
-                <a:spcPts val="0"/>
-              </a:spcAft>
+              <a:lnSpc>
+                <a:spcPct val="100000"/>
+              </a:lnSpc>
+              <a:spcBef>
+                <a:spcPts val="0"/>
+              </a:spcBef>
+              <a:spcAft>
+                <a:spcPts val="0"/>
+              </a:spcAft>
+              <a:buClr>
+                <a:srgbClr val="000000"/>
+              </a:buClr>
               <a:buSzPts val="1400"/>
+              <a:buFont typeface="Arial"/>
               <a:buNone/>
               <a:defRPr b="0" i="0" sz="1800" u="none" cap="none" strike="noStrike">
                 <a:solidFill>
@@ -1094,13 +1332,20 @@
               </a:defRPr>
             </a:lvl7pPr>
             <a:lvl8pPr lvl="7" marR="0" rtl="0" algn="l">
-              <a:spcBef>
-                <a:spcPts val="0"/>
-              </a:spcBef>
-              <a:spcAft>
-                <a:spcPts val="0"/>
-              </a:spcAft>
+              <a:lnSpc>
+                <a:spcPct val="100000"/>
+              </a:lnSpc>
+              <a:spcBef>
+                <a:spcPts val="0"/>
+              </a:spcBef>
+              <a:spcAft>
+                <a:spcPts val="0"/>
+              </a:spcAft>
+              <a:buClr>
+                <a:srgbClr val="000000"/>
+              </a:buClr>
               <a:buSzPts val="1400"/>
+              <a:buFont typeface="Arial"/>
               <a:buNone/>
               <a:defRPr b="0" i="0" sz="1800" u="none" cap="none" strike="noStrike">
                 <a:solidFill>
@@ -1113,13 +1358,20 @@
               </a:defRPr>
             </a:lvl8pPr>
             <a:lvl9pPr lvl="8" marR="0" rtl="0" algn="l">
-              <a:spcBef>
-                <a:spcPts val="0"/>
-              </a:spcBef>
-              <a:spcAft>
-                <a:spcPts val="0"/>
-              </a:spcAft>
+              <a:lnSpc>
+                <a:spcPct val="100000"/>
+              </a:lnSpc>
+              <a:spcBef>
+                <a:spcPts val="0"/>
+              </a:spcBef>
+              <a:spcAft>
+                <a:spcPts val="0"/>
+              </a:spcAft>
+              <a:buClr>
+                <a:srgbClr val="000000"/>
+              </a:buClr>
               <a:buSzPts val="1400"/>
+              <a:buFont typeface="Arial"/>
               <a:buNone/>
               <a:defRPr b="0" i="0" sz="1800" u="none" cap="none" strike="noStrike">
                 <a:solidFill>
@@ -1163,12 +1415,20 @@
           <a:lstStyle/>
           <a:p>
             <a:pPr indent="0" lvl="0" marL="0" marR="0" rtl="0" algn="r">
-              <a:spcBef>
-                <a:spcPts val="0"/>
-              </a:spcBef>
-              <a:spcAft>
-                <a:spcPts val="0"/>
-              </a:spcAft>
+              <a:lnSpc>
+                <a:spcPct val="100000"/>
+              </a:lnSpc>
+              <a:spcBef>
+                <a:spcPts val="0"/>
+              </a:spcBef>
+              <a:spcAft>
+                <a:spcPts val="0"/>
+              </a:spcAft>
+              <a:buClr>
+                <a:srgbClr val="000000"/>
+              </a:buClr>
+              <a:buSzPts val="1200"/>
+              <a:buFont typeface="Arial"/>
               <a:buNone/>
             </a:pPr>
             <a:fld id="{00000000-1234-1234-1234-123412341234}" type="slidenum">
@@ -1520,12 +1780,16 @@
           <a:lstStyle/>
           <a:p>
             <a:pPr indent="0" lvl="0" marL="0" rtl="0" algn="l">
-              <a:spcBef>
-                <a:spcPts val="0"/>
-              </a:spcBef>
-              <a:spcAft>
-                <a:spcPts val="0"/>
-              </a:spcAft>
+              <a:lnSpc>
+                <a:spcPct val="100000"/>
+              </a:lnSpc>
+              <a:spcBef>
+                <a:spcPts val="0"/>
+              </a:spcBef>
+              <a:spcAft>
+                <a:spcPts val="0"/>
+              </a:spcAft>
+              <a:buSzPts val="1400"/>
               <a:buNone/>
             </a:pPr>
             <a:r>
@@ -1563,12 +1827,16 @@
           <a:lstStyle/>
           <a:p>
             <a:pPr indent="0" lvl="0" marL="0" rtl="0" algn="r">
-              <a:spcBef>
-                <a:spcPts val="0"/>
-              </a:spcBef>
-              <a:spcAft>
-                <a:spcPts val="0"/>
-              </a:spcAft>
+              <a:lnSpc>
+                <a:spcPct val="100000"/>
+              </a:lnSpc>
+              <a:spcBef>
+                <a:spcPts val="0"/>
+              </a:spcBef>
+              <a:spcAft>
+                <a:spcPts val="0"/>
+              </a:spcAft>
+              <a:buSzPts val="1400"/>
               <a:buNone/>
             </a:pPr>
             <a:fld id="{00000000-1234-1234-1234-123412341234}" type="slidenum">
@@ -1677,12 +1945,16 @@
           <a:lstStyle/>
           <a:p>
             <a:pPr indent="0" lvl="0" marL="0" rtl="0" algn="l">
-              <a:spcBef>
-                <a:spcPts val="0"/>
-              </a:spcBef>
-              <a:spcAft>
-                <a:spcPts val="0"/>
-              </a:spcAft>
+              <a:lnSpc>
+                <a:spcPct val="100000"/>
+              </a:lnSpc>
+              <a:spcBef>
+                <a:spcPts val="0"/>
+              </a:spcBef>
+              <a:spcAft>
+                <a:spcPts val="0"/>
+              </a:spcAft>
+              <a:buSzPts val="1400"/>
               <a:buNone/>
             </a:pPr>
             <a:r>
@@ -1720,12 +1992,16 @@
           <a:lstStyle/>
           <a:p>
             <a:pPr indent="0" lvl="0" marL="0" rtl="0" algn="r">
-              <a:spcBef>
-                <a:spcPts val="0"/>
-              </a:spcBef>
-              <a:spcAft>
-                <a:spcPts val="0"/>
-              </a:spcAft>
+              <a:lnSpc>
+                <a:spcPct val="100000"/>
+              </a:lnSpc>
+              <a:spcBef>
+                <a:spcPts val="0"/>
+              </a:spcBef>
+              <a:spcAft>
+                <a:spcPts val="0"/>
+              </a:spcAft>
+              <a:buSzPts val="1400"/>
               <a:buNone/>
             </a:pPr>
             <a:fld id="{00000000-1234-1234-1234-123412341234}" type="slidenum">
@@ -1834,12 +2110,16 @@
           <a:lstStyle/>
           <a:p>
             <a:pPr indent="0" lvl="0" marL="0" rtl="0" algn="l">
-              <a:spcBef>
-                <a:spcPts val="0"/>
-              </a:spcBef>
-              <a:spcAft>
-                <a:spcPts val="0"/>
-              </a:spcAft>
+              <a:lnSpc>
+                <a:spcPct val="100000"/>
+              </a:lnSpc>
+              <a:spcBef>
+                <a:spcPts val="0"/>
+              </a:spcBef>
+              <a:spcAft>
+                <a:spcPts val="0"/>
+              </a:spcAft>
+              <a:buSzPts val="1400"/>
               <a:buNone/>
             </a:pPr>
             <a:r>
@@ -1877,12 +2157,16 @@
           <a:lstStyle/>
           <a:p>
             <a:pPr indent="0" lvl="0" marL="0" rtl="0" algn="r">
-              <a:spcBef>
-                <a:spcPts val="0"/>
-              </a:spcBef>
-              <a:spcAft>
-                <a:spcPts val="0"/>
-              </a:spcAft>
+              <a:lnSpc>
+                <a:spcPct val="100000"/>
+              </a:lnSpc>
+              <a:spcBef>
+                <a:spcPts val="0"/>
+              </a:spcBef>
+              <a:spcAft>
+                <a:spcPts val="0"/>
+              </a:spcAft>
+              <a:buSzPts val="1400"/>
               <a:buNone/>
             </a:pPr>
             <a:fld id="{00000000-1234-1234-1234-123412341234}" type="slidenum">
@@ -1991,12 +2275,16 @@
           <a:lstStyle/>
           <a:p>
             <a:pPr indent="0" lvl="0" marL="0" rtl="0" algn="l">
-              <a:spcBef>
-                <a:spcPts val="0"/>
-              </a:spcBef>
-              <a:spcAft>
-                <a:spcPts val="0"/>
-              </a:spcAft>
+              <a:lnSpc>
+                <a:spcPct val="100000"/>
+              </a:lnSpc>
+              <a:spcBef>
+                <a:spcPts val="0"/>
+              </a:spcBef>
+              <a:spcAft>
+                <a:spcPts val="0"/>
+              </a:spcAft>
+              <a:buSzPts val="1400"/>
               <a:buNone/>
             </a:pPr>
             <a:r>
@@ -2034,12 +2322,16 @@
           <a:lstStyle/>
           <a:p>
             <a:pPr indent="0" lvl="0" marL="0" rtl="0" algn="r">
-              <a:spcBef>
-                <a:spcPts val="0"/>
-              </a:spcBef>
-              <a:spcAft>
-                <a:spcPts val="0"/>
-              </a:spcAft>
+              <a:lnSpc>
+                <a:spcPct val="100000"/>
+              </a:lnSpc>
+              <a:spcBef>
+                <a:spcPts val="0"/>
+              </a:spcBef>
+              <a:spcAft>
+                <a:spcPts val="0"/>
+              </a:spcAft>
+              <a:buSzPts val="1400"/>
               <a:buNone/>
             </a:pPr>
             <a:fld id="{00000000-1234-1234-1234-123412341234}" type="slidenum">
@@ -2148,12 +2440,16 @@
           <a:lstStyle/>
           <a:p>
             <a:pPr indent="0" lvl="0" marL="0" rtl="0" algn="l">
-              <a:spcBef>
-                <a:spcPts val="0"/>
-              </a:spcBef>
-              <a:spcAft>
-                <a:spcPts val="0"/>
-              </a:spcAft>
+              <a:lnSpc>
+                <a:spcPct val="100000"/>
+              </a:lnSpc>
+              <a:spcBef>
+                <a:spcPts val="0"/>
+              </a:spcBef>
+              <a:spcAft>
+                <a:spcPts val="0"/>
+              </a:spcAft>
+              <a:buSzPts val="1400"/>
               <a:buNone/>
             </a:pPr>
             <a:r>
@@ -2191,12 +2487,16 @@
           <a:lstStyle/>
           <a:p>
             <a:pPr indent="0" lvl="0" marL="0" rtl="0" algn="r">
-              <a:spcBef>
-                <a:spcPts val="0"/>
-              </a:spcBef>
-              <a:spcAft>
-                <a:spcPts val="0"/>
-              </a:spcAft>
+              <a:lnSpc>
+                <a:spcPct val="100000"/>
+              </a:lnSpc>
+              <a:spcBef>
+                <a:spcPts val="0"/>
+              </a:spcBef>
+              <a:spcAft>
+                <a:spcPts val="0"/>
+              </a:spcAft>
+              <a:buSzPts val="1400"/>
               <a:buNone/>
             </a:pPr>
             <a:fld id="{00000000-1234-1234-1234-123412341234}" type="slidenum">
@@ -2206,6 +2506,204 @@
             <a:endParaRPr/>
           </a:p>
         </p:txBody>
+      </p:sp>
+    </p:spTree>
+  </p:cSld>
+  <p:clrMapOvr>
+    <a:masterClrMapping/>
+  </p:clrMapOvr>
+</p:notes>
+</file>
+
+<file path=ppt/notesSlides/notesSlide6.xml><?xml version="1.0" encoding="utf-8"?>
+<p:notes xmlns:a="http://schemas.openxmlformats.org/drawingml/2006/main" xmlns:r="http://schemas.openxmlformats.org/officeDocument/2006/relationships" xmlns:mc="http://schemas.openxmlformats.org/markup-compatibility/2006" xmlns:mv="urn:schemas-microsoft-com:mac:vml" xmlns:p="http://schemas.openxmlformats.org/presentationml/2006/main" xmlns:c="http://schemas.openxmlformats.org/drawingml/2006/chart" xmlns:dgm="http://schemas.openxmlformats.org/drawingml/2006/diagram" xmlns:o="urn:schemas-microsoft-com:office:office" xmlns:v="urn:schemas-microsoft-com:vml" xmlns:pvml="urn:schemas-microsoft-com:office:powerpoint" xmlns:com="http://schemas.openxmlformats.org/drawingml/2006/compatibility" xmlns:p14="http://schemas.microsoft.com/office/powerpoint/2010/main" xmlns:p15="http://schemas.microsoft.com/office/powerpoint/2012/main" xmlns:ahyp="http://schemas.microsoft.com/office/drawing/2018/hyperlinkcolor" showMasterPhAnim="0" showMasterSp="0">
+  <p:cSld>
+    <p:spTree>
+      <p:nvGrpSpPr>
+        <p:cNvPr id="92" name="Shape 92"/>
+        <p:cNvGrpSpPr/>
+        <p:nvPr/>
+      </p:nvGrpSpPr>
+      <p:grpSpPr>
+        <a:xfrm>
+          <a:off x="0" y="0"/>
+          <a:ext cx="0" cy="0"/>
+          <a:chOff x="0" y="0"/>
+          <a:chExt cx="0" cy="0"/>
+        </a:xfrm>
+      </p:grpSpPr>
+      <p:sp>
+        <p:nvSpPr>
+          <p:cNvPr id="93" name="Google Shape;93;p8:notes"/>
+          <p:cNvSpPr txBox="1"/>
+          <p:nvPr>
+            <p:ph idx="1" type="body"/>
+          </p:nvPr>
+        </p:nvSpPr>
+        <p:spPr>
+          <a:xfrm>
+            <a:off x="685800" y="4400550"/>
+            <a:ext cx="5486400" cy="3600450"/>
+          </a:xfrm>
+          <a:prstGeom prst="rect">
+            <a:avLst/>
+          </a:prstGeom>
+        </p:spPr>
+        <p:txBody>
+          <a:bodyPr anchorCtr="0" anchor="t" bIns="45700" lIns="91425" spcFirstLastPara="1" rIns="91425" wrap="square" tIns="45700">
+            <a:noAutofit/>
+          </a:bodyPr>
+          <a:lstStyle/>
+          <a:p>
+            <a:pPr indent="0" lvl="0" marL="0" rtl="0" algn="l">
+              <a:spcBef>
+                <a:spcPts val="0"/>
+              </a:spcBef>
+              <a:spcAft>
+                <a:spcPts val="0"/>
+              </a:spcAft>
+              <a:buNone/>
+            </a:pPr>
+            <a:r>
+              <a:t/>
+            </a:r>
+            <a:endParaRPr/>
+          </a:p>
+        </p:txBody>
+      </p:sp>
+      <p:sp>
+        <p:nvSpPr>
+          <p:cNvPr id="94" name="Google Shape;94;p8:notes"/>
+          <p:cNvSpPr/>
+          <p:nvPr>
+            <p:ph idx="2" type="sldImg"/>
+          </p:nvPr>
+        </p:nvSpPr>
+        <p:spPr>
+          <a:xfrm>
+            <a:off x="685800" y="1143000"/>
+            <a:ext cx="5486400" cy="3086100"/>
+          </a:xfrm>
+          <a:custGeom>
+            <a:rect b="b" l="l" r="r" t="t"/>
+            <a:pathLst>
+              <a:path extrusionOk="0" h="120000" w="120000">
+                <a:moveTo>
+                  <a:pt x="0" y="0"/>
+                </a:moveTo>
+                <a:lnTo>
+                  <a:pt x="120000" y="0"/>
+                </a:lnTo>
+                <a:lnTo>
+                  <a:pt x="120000" y="120000"/>
+                </a:lnTo>
+                <a:lnTo>
+                  <a:pt x="0" y="120000"/>
+                </a:lnTo>
+                <a:close/>
+              </a:path>
+            </a:pathLst>
+          </a:custGeom>
+        </p:spPr>
+      </p:sp>
+    </p:spTree>
+  </p:cSld>
+  <p:clrMapOvr>
+    <a:masterClrMapping/>
+  </p:clrMapOvr>
+</p:notes>
+</file>
+
+<file path=ppt/notesSlides/notesSlide7.xml><?xml version="1.0" encoding="utf-8"?>
+<p:notes xmlns:a="http://schemas.openxmlformats.org/drawingml/2006/main" xmlns:r="http://schemas.openxmlformats.org/officeDocument/2006/relationships" xmlns:mc="http://schemas.openxmlformats.org/markup-compatibility/2006" xmlns:mv="urn:schemas-microsoft-com:mac:vml" xmlns:p="http://schemas.openxmlformats.org/presentationml/2006/main" xmlns:c="http://schemas.openxmlformats.org/drawingml/2006/chart" xmlns:dgm="http://schemas.openxmlformats.org/drawingml/2006/diagram" xmlns:o="urn:schemas-microsoft-com:office:office" xmlns:v="urn:schemas-microsoft-com:vml" xmlns:pvml="urn:schemas-microsoft-com:office:powerpoint" xmlns:com="http://schemas.openxmlformats.org/drawingml/2006/compatibility" xmlns:p14="http://schemas.microsoft.com/office/powerpoint/2010/main" xmlns:p15="http://schemas.microsoft.com/office/powerpoint/2012/main" xmlns:ahyp="http://schemas.microsoft.com/office/drawing/2018/hyperlinkcolor" showMasterPhAnim="0" showMasterSp="0">
+  <p:cSld>
+    <p:spTree>
+      <p:nvGrpSpPr>
+        <p:cNvPr id="103" name="Shape 103"/>
+        <p:cNvGrpSpPr/>
+        <p:nvPr/>
+      </p:nvGrpSpPr>
+      <p:grpSpPr>
+        <a:xfrm>
+          <a:off x="0" y="0"/>
+          <a:ext cx="0" cy="0"/>
+          <a:chOff x="0" y="0"/>
+          <a:chExt cx="0" cy="0"/>
+        </a:xfrm>
+      </p:grpSpPr>
+      <p:sp>
+        <p:nvSpPr>
+          <p:cNvPr id="104" name="Google Shape;104;p9:notes"/>
+          <p:cNvSpPr txBox="1"/>
+          <p:nvPr>
+            <p:ph idx="1" type="body"/>
+          </p:nvPr>
+        </p:nvSpPr>
+        <p:spPr>
+          <a:xfrm>
+            <a:off x="685800" y="4400550"/>
+            <a:ext cx="5486400" cy="3600450"/>
+          </a:xfrm>
+          <a:prstGeom prst="rect">
+            <a:avLst/>
+          </a:prstGeom>
+        </p:spPr>
+        <p:txBody>
+          <a:bodyPr anchorCtr="0" anchor="t" bIns="45700" lIns="91425" spcFirstLastPara="1" rIns="91425" wrap="square" tIns="45700">
+            <a:noAutofit/>
+          </a:bodyPr>
+          <a:lstStyle/>
+          <a:p>
+            <a:pPr indent="0" lvl="0" marL="0" rtl="0" algn="l">
+              <a:spcBef>
+                <a:spcPts val="0"/>
+              </a:spcBef>
+              <a:spcAft>
+                <a:spcPts val="0"/>
+              </a:spcAft>
+              <a:buNone/>
+            </a:pPr>
+            <a:r>
+              <a:t/>
+            </a:r>
+            <a:endParaRPr/>
+          </a:p>
+        </p:txBody>
+      </p:sp>
+      <p:sp>
+        <p:nvSpPr>
+          <p:cNvPr id="105" name="Google Shape;105;p9:notes"/>
+          <p:cNvSpPr/>
+          <p:nvPr>
+            <p:ph idx="2" type="sldImg"/>
+          </p:nvPr>
+        </p:nvSpPr>
+        <p:spPr>
+          <a:xfrm>
+            <a:off x="685800" y="1143000"/>
+            <a:ext cx="5486400" cy="3086100"/>
+          </a:xfrm>
+          <a:custGeom>
+            <a:rect b="b" l="l" r="r" t="t"/>
+            <a:pathLst>
+              <a:path extrusionOk="0" h="120000" w="120000">
+                <a:moveTo>
+                  <a:pt x="0" y="0"/>
+                </a:moveTo>
+                <a:lnTo>
+                  <a:pt x="120000" y="0"/>
+                </a:lnTo>
+                <a:lnTo>
+                  <a:pt x="120000" y="120000"/>
+                </a:lnTo>
+                <a:lnTo>
+                  <a:pt x="0" y="120000"/>
+                </a:lnTo>
+                <a:close/>
+              </a:path>
+            </a:pathLst>
+          </a:custGeom>
+        </p:spPr>
       </p:sp>
     </p:spTree>
   </p:cSld>
@@ -3013,6 +3511,9 @@
           <a:lstStyle/>
           <a:p>
             <a:pPr indent="0" lvl="0" marL="0" marR="0" rtl="0" algn="l">
+              <a:lnSpc>
+                <a:spcPct val="100000"/>
+              </a:lnSpc>
               <a:spcBef>
                 <a:spcPts val="0"/>
               </a:spcBef>
@@ -3025,11 +3526,6 @@
               <a:buSzPts val="3400"/>
               <a:buFont typeface="Play"/>
               <a:buNone/>
-              <a:defRPr sz="3400" b="1">
-                <a:solidFill>
-                  <a:srgbClr val="18181B"/>
-                </a:solidFill>
-              </a:defRPr>
             </a:pPr>
             <a:r>
               <a:rPr b="1" i="0" lang="en-US" sz="3400" u="none" cap="none" strike="noStrike">
@@ -3081,6 +3577,9 @@
           <a:lstStyle/>
           <a:p>
             <a:pPr indent="0" lvl="0" marL="0" marR="0" rtl="0" algn="l">
+              <a:lnSpc>
+                <a:spcPct val="100000"/>
+              </a:lnSpc>
               <a:spcBef>
                 <a:spcPts val="0"/>
               </a:spcBef>
@@ -3093,11 +3592,6 @@
               <a:buSzPts val="1700"/>
               <a:buFont typeface="Arial"/>
               <a:buNone/>
-              <a:defRPr sz="1400" b="0">
-                <a:solidFill>
-                  <a:srgbClr val="505864"/>
-                </a:solidFill>
-              </a:defRPr>
             </a:pPr>
             <a:r>
               <a:rPr b="0" i="0" lang="en-US" sz="1400" u="none" cap="none" strike="noStrike">
@@ -3157,6 +3651,9 @@
           <a:lstStyle/>
           <a:p>
             <a:pPr indent="0" lvl="0" marL="0" marR="0" rtl="0" algn="ctr">
+              <a:lnSpc>
+                <a:spcPct val="100000"/>
+              </a:lnSpc>
               <a:spcBef>
                 <a:spcPts val="0"/>
               </a:spcBef>
@@ -3169,14 +3666,9 @@
               <a:buSzPts val="1100"/>
               <a:buFont typeface="Arial"/>
               <a:buNone/>
-              <a:defRPr sz="1800" b="1">
-                <a:solidFill>
-                  <a:srgbClr val="DC2626"/>
-                </a:solidFill>
-              </a:defRPr>
-            </a:pPr>
-            <a:r>
-              <a:rPr b="1" i="0" lang="en-US" u="none" cap="none" strike="noStrike" sz="1800">
+            </a:pPr>
+            <a:r>
+              <a:rPr b="1" i="0" lang="en-US" sz="1800" u="none" cap="none" strike="noStrike">
                 <a:solidFill>
                   <a:srgbClr val="FFFFFF"/>
                 </a:solidFill>
@@ -3187,7 +3679,7 @@
               </a:rPr>
               <a:t>Discover</a:t>
             </a:r>
-            <a:endParaRPr b="0" i="0" u="none" cap="none" strike="noStrike">
+            <a:endParaRPr b="0" i="0" sz="1400" u="none" cap="none" strike="noStrike">
               <a:solidFill>
                 <a:schemeClr val="dk1"/>
               </a:solidFill>
@@ -3225,6 +3717,9 @@
           <a:lstStyle/>
           <a:p>
             <a:pPr indent="0" lvl="0" marL="0" marR="0" rtl="0" algn="ctr">
+              <a:lnSpc>
+                <a:spcPct val="100000"/>
+              </a:lnSpc>
               <a:spcBef>
                 <a:spcPts val="0"/>
               </a:spcBef>
@@ -3237,11 +3732,6 @@
               <a:buSzPts val="1100"/>
               <a:buFont typeface="Arial"/>
               <a:buNone/>
-              <a:defRPr sz="1400" b="0">
-                <a:solidFill>
-                  <a:srgbClr val="505864"/>
-                </a:solidFill>
-              </a:defRPr>
             </a:pPr>
             <a:r>
               <a:rPr b="0" i="0" lang="en-US" sz="1400" u="none" cap="none" strike="noStrike">
@@ -3327,6 +3817,9 @@
           <a:lstStyle/>
           <a:p>
             <a:pPr indent="0" lvl="0" marL="0" marR="0" rtl="0" algn="ctr">
+              <a:lnSpc>
+                <a:spcPct val="100000"/>
+              </a:lnSpc>
               <a:spcBef>
                 <a:spcPts val="0"/>
               </a:spcBef>
@@ -3339,14 +3832,9 @@
               <a:buSzPts val="1100"/>
               <a:buFont typeface="Arial"/>
               <a:buNone/>
-              <a:defRPr sz="1800" b="1">
-                <a:solidFill>
-                  <a:srgbClr val="EA580C"/>
-                </a:solidFill>
-              </a:defRPr>
-            </a:pPr>
-            <a:r>
-              <a:rPr b="1" i="0" lang="en-US" u="none" cap="none" strike="noStrike" sz="1800">
+            </a:pPr>
+            <a:r>
+              <a:rPr b="1" i="0" lang="en-US" sz="1800" u="none" cap="none" strike="noStrike">
                 <a:solidFill>
                   <a:srgbClr val="FFFFFF"/>
                 </a:solidFill>
@@ -3357,7 +3845,7 @@
               </a:rPr>
               <a:t>Verify</a:t>
             </a:r>
-            <a:endParaRPr b="0" i="0" u="none" cap="none" strike="noStrike">
+            <a:endParaRPr b="0" i="0" sz="1400" u="none" cap="none" strike="noStrike">
               <a:solidFill>
                 <a:schemeClr val="dk1"/>
               </a:solidFill>
@@ -3395,6 +3883,9 @@
           <a:lstStyle/>
           <a:p>
             <a:pPr indent="0" lvl="0" marL="0" marR="0" rtl="0" algn="ctr">
+              <a:lnSpc>
+                <a:spcPct val="100000"/>
+              </a:lnSpc>
               <a:spcBef>
                 <a:spcPts val="0"/>
               </a:spcBef>
@@ -3407,11 +3898,6 @@
               <a:buSzPts val="1100"/>
               <a:buFont typeface="Arial"/>
               <a:buNone/>
-              <a:defRPr sz="1400" b="0">
-                <a:solidFill>
-                  <a:srgbClr val="505864"/>
-                </a:solidFill>
-              </a:defRPr>
             </a:pPr>
             <a:r>
               <a:rPr b="0" i="0" lang="en-US" sz="1400" u="none" cap="none" strike="noStrike">
@@ -3497,6 +3983,9 @@
           <a:lstStyle/>
           <a:p>
             <a:pPr indent="0" lvl="0" marL="0" marR="0" rtl="0" algn="ctr">
+              <a:lnSpc>
+                <a:spcPct val="100000"/>
+              </a:lnSpc>
               <a:spcBef>
                 <a:spcPts val="0"/>
               </a:spcBef>
@@ -3509,14 +3998,9 @@
               <a:buSzPts val="1100"/>
               <a:buFont typeface="Arial"/>
               <a:buNone/>
-              <a:defRPr sz="1800" b="1">
-                <a:solidFill>
-                  <a:srgbClr val="7C3AED"/>
-                </a:solidFill>
-              </a:defRPr>
-            </a:pPr>
-            <a:r>
-              <a:rPr b="1" i="0" lang="en-US" u="none" cap="none" strike="noStrike" sz="1800">
+            </a:pPr>
+            <a:r>
+              <a:rPr b="1" i="0" lang="en-US" sz="1800" u="none" cap="none" strike="noStrike">
                 <a:solidFill>
                   <a:srgbClr val="FFFFFF"/>
                 </a:solidFill>
@@ -3527,7 +4011,7 @@
               </a:rPr>
               <a:t>Ground</a:t>
             </a:r>
-            <a:endParaRPr b="0" i="0" u="none" cap="none" strike="noStrike">
+            <a:endParaRPr b="0" i="0" sz="1400" u="none" cap="none" strike="noStrike">
               <a:solidFill>
                 <a:schemeClr val="dk1"/>
               </a:solidFill>
@@ -3565,6 +4049,9 @@
           <a:lstStyle/>
           <a:p>
             <a:pPr indent="0" lvl="0" marL="0" marR="0" rtl="0" algn="ctr">
+              <a:lnSpc>
+                <a:spcPct val="100000"/>
+              </a:lnSpc>
               <a:spcBef>
                 <a:spcPts val="0"/>
               </a:spcBef>
@@ -3577,11 +4064,6 @@
               <a:buSzPts val="1100"/>
               <a:buFont typeface="Arial"/>
               <a:buNone/>
-              <a:defRPr sz="1400" b="0">
-                <a:solidFill>
-                  <a:srgbClr val="505864"/>
-                </a:solidFill>
-              </a:defRPr>
             </a:pPr>
             <a:r>
               <a:rPr b="0" i="0" lang="en-US" sz="1400" u="none" cap="none" strike="noStrike">
@@ -3667,6 +4149,9 @@
           <a:lstStyle/>
           <a:p>
             <a:pPr indent="0" lvl="0" marL="0" marR="0" rtl="0" algn="ctr">
+              <a:lnSpc>
+                <a:spcPct val="100000"/>
+              </a:lnSpc>
               <a:spcBef>
                 <a:spcPts val="0"/>
               </a:spcBef>
@@ -3679,14 +4164,9 @@
               <a:buSzPts val="1100"/>
               <a:buFont typeface="Arial"/>
               <a:buNone/>
-              <a:defRPr sz="1800" b="1">
-                <a:solidFill>
-                  <a:srgbClr val="166534"/>
-                </a:solidFill>
-              </a:defRPr>
-            </a:pPr>
-            <a:r>
-              <a:rPr b="1" i="0" lang="en-US" u="none" cap="none" strike="noStrike" sz="1800">
+            </a:pPr>
+            <a:r>
+              <a:rPr b="1" i="0" lang="en-US" sz="1800" u="none" cap="none" strike="noStrike">
                 <a:solidFill>
                   <a:srgbClr val="FFFFFF"/>
                 </a:solidFill>
@@ -3697,7 +4177,7 @@
               </a:rPr>
               <a:t>Validate</a:t>
             </a:r>
-            <a:endParaRPr b="0" i="0" u="none" cap="none" strike="noStrike">
+            <a:endParaRPr b="0" i="0" sz="1400" u="none" cap="none" strike="noStrike">
               <a:solidFill>
                 <a:schemeClr val="dk1"/>
               </a:solidFill>
@@ -3735,6 +4215,9 @@
           <a:lstStyle/>
           <a:p>
             <a:pPr indent="0" lvl="0" marL="0" marR="0" rtl="0" algn="ctr">
+              <a:lnSpc>
+                <a:spcPct val="100000"/>
+              </a:lnSpc>
               <a:spcBef>
                 <a:spcPts val="0"/>
               </a:spcBef>
@@ -3747,11 +4230,6 @@
               <a:buSzPts val="1100"/>
               <a:buFont typeface="Arial"/>
               <a:buNone/>
-              <a:defRPr sz="1400" b="0">
-                <a:solidFill>
-                  <a:srgbClr val="505864"/>
-                </a:solidFill>
-              </a:defRPr>
             </a:pPr>
             <a:r>
               <a:rPr b="0" i="0" lang="en-US" sz="1400" u="none" cap="none" strike="noStrike">
@@ -3811,6 +4289,9 @@
           <a:lstStyle/>
           <a:p>
             <a:pPr indent="0" lvl="0" marL="0" marR="0" rtl="0" algn="ctr">
+              <a:lnSpc>
+                <a:spcPct val="100000"/>
+              </a:lnSpc>
               <a:spcBef>
                 <a:spcPts val="0"/>
               </a:spcBef>
@@ -3823,35 +4304,18 @@
               <a:buSzPts val="1500"/>
               <a:buFont typeface="Arial"/>
               <a:buNone/>
-              <a:defRPr sz="1400" b="0">
+            </a:pPr>
+            <a:r>
+              <a:rPr b="0" i="0" lang="en-US" sz="1400" u="none" cap="none" strike="noStrike">
                 <a:solidFill>
                   <a:srgbClr val="505864"/>
                 </a:solidFill>
-              </a:defRPr>
-            </a:pPr>
-            <a:r>
-              <a:rPr b="0" i="0" lang="en-US" sz="1400" u="none" cap="none" strike="noStrike">
-                <a:solidFill>
-                  <a:srgbClr val="505864"/>
-                </a:solidFill>
                 <a:latin typeface="Arial"/>
                 <a:ea typeface="Arial"/>
                 <a:cs typeface="Arial"/>
                 <a:sym typeface="Arial"/>
               </a:rPr>
-              <a:t>Project output: </a:t>
-            </a:r>
-            <a:r>
-              <a:rPr b="0" i="0" lang="en-US" sz="1400" u="none" cap="none" strike="noStrike">
-                <a:solidFill>
-                  <a:srgbClr val="505864"/>
-                </a:solidFill>
-                <a:latin typeface="Arial"/>
-                <a:ea typeface="Arial"/>
-                <a:cs typeface="Arial"/>
-                <a:sym typeface="Arial"/>
-              </a:rPr>
-              <a:t>resume · cover letter · notes · provenance · application history</a:t>
+              <a:t>Project output: resume · cover letter · notes · provenance · application history</a:t>
             </a:r>
             <a:endParaRPr b="0" i="0" sz="1500" u="none" cap="none" strike="noStrike">
               <a:solidFill>
@@ -3891,6 +4355,9 @@
           <a:lstStyle/>
           <a:p>
             <a:pPr indent="0" lvl="0" marL="0" marR="0" rtl="0" algn="l">
+              <a:lnSpc>
+                <a:spcPct val="100000"/>
+              </a:lnSpc>
               <a:spcBef>
                 <a:spcPts val="0"/>
               </a:spcBef>
@@ -3903,11 +4370,6 @@
               <a:buSzPts val="850"/>
               <a:buFont typeface="Arial"/>
               <a:buNone/>
-              <a:defRPr sz="900" b="0">
-                <a:solidFill>
-                  <a:srgbClr val="6E7680"/>
-                </a:solidFill>
-              </a:defRPr>
             </a:pPr>
             <a:r>
               <a:rPr b="0" i="0" lang="en-US" sz="900" u="none" cap="none" strike="noStrike">
@@ -3984,6 +4446,9 @@
           <a:lstStyle/>
           <a:p>
             <a:pPr indent="0" lvl="0" marL="0" marR="0" rtl="0" algn="l">
+              <a:lnSpc>
+                <a:spcPct val="100000"/>
+              </a:lnSpc>
               <a:spcBef>
                 <a:spcPts val="0"/>
               </a:spcBef>
@@ -3996,11 +4461,6 @@
               <a:buSzPts val="2700"/>
               <a:buFont typeface="Play"/>
               <a:buNone/>
-              <a:defRPr sz="3000" b="1">
-                <a:solidFill>
-                  <a:srgbClr val="18181B"/>
-                </a:solidFill>
-              </a:defRPr>
             </a:pPr>
             <a:r>
               <a:rPr b="1" i="0" lang="en-US" sz="3000" u="none" cap="none" strike="noStrike">
@@ -4052,6 +4512,9 @@
           <a:lstStyle/>
           <a:p>
             <a:pPr indent="0" lvl="0" marL="0" marR="0" rtl="0" algn="l">
+              <a:lnSpc>
+                <a:spcPct val="100000"/>
+              </a:lnSpc>
               <a:spcBef>
                 <a:spcPts val="0"/>
               </a:spcBef>
@@ -4064,11 +4527,6 @@
               <a:buSzPts val="1250"/>
               <a:buFont typeface="Arial"/>
               <a:buNone/>
-              <a:defRPr sz="1400" b="0">
-                <a:solidFill>
-                  <a:srgbClr val="505864"/>
-                </a:solidFill>
-              </a:defRPr>
             </a:pPr>
             <a:r>
               <a:rPr b="0" i="0" lang="en-US" sz="1400" u="none" cap="none" strike="noStrike">
@@ -4128,6 +4586,9 @@
           <a:lstStyle/>
           <a:p>
             <a:pPr indent="0" lvl="0" marL="0" marR="0" rtl="0" algn="l">
+              <a:lnSpc>
+                <a:spcPct val="100000"/>
+              </a:lnSpc>
               <a:spcBef>
                 <a:spcPts val="0"/>
               </a:spcBef>
@@ -4140,21 +4601,20 @@
               <a:buSzPts val="1120"/>
               <a:buFont typeface="Arial"/>
               <a:buNone/>
-              <a:defRPr sz="1400" b="0">
-                <a:solidFill>
-                  <a:srgbClr val="505864"/>
-                </a:solidFill>
-              </a:defRPr>
-            </a:pPr>
-            <a:r>
-              <a:rPr sz="1800" b="1">
+            </a:pPr>
+            <a:r>
+              <a:rPr b="1" i="0" lang="en-US" sz="1800" u="none" cap="none" strike="noStrike">
                 <a:solidFill>
                   <a:srgbClr val="DC2626"/>
                 </a:solidFill>
+                <a:latin typeface="Arial"/>
+                <a:ea typeface="Arial"/>
+                <a:cs typeface="Arial"/>
+                <a:sym typeface="Arial"/>
               </a:rPr>
               <a:t>Stale openings</a:t>
             </a:r>
-            <a:endParaRPr b="1" i="0" u="none" cap="none" strike="noStrike">
+            <a:endParaRPr b="1" i="0" sz="1400" u="none" cap="none" strike="noStrike">
               <a:solidFill>
                 <a:srgbClr val="1A1A1A"/>
               </a:solidFill>
@@ -4164,17 +4624,58 @@
               <a:sym typeface="Arial"/>
             </a:endParaRPr>
           </a:p>
-          <a:p/>
-          <a:p>
-            <a:pPr algn="l"/>
-            <a:r>
-              <a:rPr sz="1400" b="0">
+          <a:p>
+            <a:pPr indent="0" lvl="0" marL="0" marR="0" rtl="0" algn="l">
+              <a:lnSpc>
+                <a:spcPct val="100000"/>
+              </a:lnSpc>
+              <a:spcBef>
+                <a:spcPts val="0"/>
+              </a:spcBef>
+              <a:spcAft>
+                <a:spcPts val="0"/>
+              </a:spcAft>
+              <a:buNone/>
+            </a:pPr>
+            <a:r>
+              <a:t/>
+            </a:r>
+            <a:endParaRPr b="1" i="0" sz="1400" u="none" cap="none" strike="noStrike">
+              <a:solidFill>
+                <a:srgbClr val="1A1A1A"/>
+              </a:solidFill>
+              <a:latin typeface="Arial"/>
+              <a:ea typeface="Arial"/>
+              <a:cs typeface="Arial"/>
+              <a:sym typeface="Arial"/>
+            </a:endParaRPr>
+          </a:p>
+          <a:p>
+            <a:pPr indent="0" lvl="0" marL="0" marR="0" rtl="0" algn="l">
+              <a:lnSpc>
+                <a:spcPct val="100000"/>
+              </a:lnSpc>
+              <a:spcBef>
+                <a:spcPts val="0"/>
+              </a:spcBef>
+              <a:spcAft>
+                <a:spcPts val="0"/>
+              </a:spcAft>
+              <a:buNone/>
+            </a:pPr>
+            <a:r>
+              <a:rPr b="0" i="0" lang="en-US" sz="1400" u="none" cap="none" strike="noStrike">
                 <a:solidFill>
                   <a:srgbClr val="505864"/>
                 </a:solidFill>
+                <a:latin typeface="Arial"/>
+                <a:ea typeface="Arial"/>
+                <a:cs typeface="Arial"/>
+                <a:sym typeface="Arial"/>
               </a:rPr>
               <a:t>Search results and copied job descriptions are not proof that a role is still open.</a:t>
             </a:r>
+            <a:endParaRPr/>
           </a:p>
         </p:txBody>
       </p:sp>
@@ -4212,6 +4713,9 @@
           <a:lstStyle/>
           <a:p>
             <a:pPr indent="0" lvl="0" marL="0" marR="0" rtl="0" algn="l">
+              <a:lnSpc>
+                <a:spcPct val="100000"/>
+              </a:lnSpc>
               <a:spcBef>
                 <a:spcPts val="0"/>
               </a:spcBef>
@@ -4224,21 +4728,20 @@
               <a:buSzPts val="1120"/>
               <a:buFont typeface="Arial"/>
               <a:buNone/>
-              <a:defRPr sz="1400" b="0">
-                <a:solidFill>
-                  <a:srgbClr val="505864"/>
-                </a:solidFill>
-              </a:defRPr>
-            </a:pPr>
-            <a:r>
-              <a:rPr sz="1800" b="1">
+            </a:pPr>
+            <a:r>
+              <a:rPr b="1" i="0" lang="en-US" sz="1800" u="none" cap="none" strike="noStrike">
                 <a:solidFill>
                   <a:srgbClr val="EA580C"/>
                 </a:solidFill>
+                <a:latin typeface="Arial"/>
+                <a:ea typeface="Arial"/>
+                <a:cs typeface="Arial"/>
+                <a:sym typeface="Arial"/>
               </a:rPr>
               <a:t>Unsupported claims</a:t>
             </a:r>
-            <a:endParaRPr b="1" i="0" u="none" cap="none" strike="noStrike">
+            <a:endParaRPr b="1" i="0" sz="1400" u="none" cap="none" strike="noStrike">
               <a:solidFill>
                 <a:srgbClr val="1A1A1A"/>
               </a:solidFill>
@@ -4248,17 +4751,58 @@
               <a:sym typeface="Arial"/>
             </a:endParaRPr>
           </a:p>
-          <a:p/>
-          <a:p>
-            <a:pPr algn="l"/>
-            <a:r>
-              <a:rPr sz="1400" b="0">
+          <a:p>
+            <a:pPr indent="0" lvl="0" marL="0" marR="0" rtl="0" algn="l">
+              <a:lnSpc>
+                <a:spcPct val="100000"/>
+              </a:lnSpc>
+              <a:spcBef>
+                <a:spcPts val="0"/>
+              </a:spcBef>
+              <a:spcAft>
+                <a:spcPts val="0"/>
+              </a:spcAft>
+              <a:buNone/>
+            </a:pPr>
+            <a:r>
+              <a:t/>
+            </a:r>
+            <a:endParaRPr b="1" i="0" sz="1400" u="none" cap="none" strike="noStrike">
+              <a:solidFill>
+                <a:srgbClr val="1A1A1A"/>
+              </a:solidFill>
+              <a:latin typeface="Arial"/>
+              <a:ea typeface="Arial"/>
+              <a:cs typeface="Arial"/>
+              <a:sym typeface="Arial"/>
+            </a:endParaRPr>
+          </a:p>
+          <a:p>
+            <a:pPr indent="0" lvl="0" marL="0" marR="0" rtl="0" algn="l">
+              <a:lnSpc>
+                <a:spcPct val="100000"/>
+              </a:lnSpc>
+              <a:spcBef>
+                <a:spcPts val="0"/>
+              </a:spcBef>
+              <a:spcAft>
+                <a:spcPts val="0"/>
+              </a:spcAft>
+              <a:buNone/>
+            </a:pPr>
+            <a:r>
+              <a:rPr b="0" i="0" lang="en-US" sz="1400" u="none" cap="none" strike="noStrike">
                 <a:solidFill>
                   <a:srgbClr val="505864"/>
                 </a:solidFill>
+                <a:latin typeface="Arial"/>
+                <a:ea typeface="Arial"/>
+                <a:cs typeface="Arial"/>
+                <a:sym typeface="Arial"/>
               </a:rPr>
               <a:t>A job description lists desired skills, not facts about the candidate.</a:t>
             </a:r>
+            <a:endParaRPr/>
           </a:p>
         </p:txBody>
       </p:sp>
@@ -4296,6 +4840,9 @@
           <a:lstStyle/>
           <a:p>
             <a:pPr indent="0" lvl="0" marL="0" marR="0" rtl="0" algn="l">
+              <a:lnSpc>
+                <a:spcPct val="100000"/>
+              </a:lnSpc>
               <a:spcBef>
                 <a:spcPts val="0"/>
               </a:spcBef>
@@ -4308,21 +4855,20 @@
               <a:buSzPts val="1120"/>
               <a:buFont typeface="Arial"/>
               <a:buNone/>
-              <a:defRPr sz="1400" b="0">
-                <a:solidFill>
-                  <a:srgbClr val="505864"/>
-                </a:solidFill>
-              </a:defRPr>
-            </a:pPr>
-            <a:r>
-              <a:rPr sz="1800" b="1">
+            </a:pPr>
+            <a:r>
+              <a:rPr b="1" i="0" lang="en-US" sz="1800" u="none" cap="none" strike="noStrike">
                 <a:solidFill>
                   <a:srgbClr val="7C3AED"/>
                 </a:solidFill>
+                <a:latin typeface="Arial"/>
+                <a:ea typeface="Arial"/>
+                <a:cs typeface="Arial"/>
+                <a:sym typeface="Arial"/>
               </a:rPr>
               <a:t>Unreviewed output</a:t>
             </a:r>
-            <a:endParaRPr b="1" i="0" u="none" cap="none" strike="noStrike">
+            <a:endParaRPr b="1" i="0" sz="1400" u="none" cap="none" strike="noStrike">
               <a:solidFill>
                 <a:srgbClr val="1A1A1A"/>
               </a:solidFill>
@@ -4332,17 +4878,58 @@
               <a:sym typeface="Arial"/>
             </a:endParaRPr>
           </a:p>
-          <a:p/>
-          <a:p>
-            <a:pPr algn="l"/>
-            <a:r>
-              <a:rPr sz="1400" b="0">
+          <a:p>
+            <a:pPr indent="0" lvl="0" marL="0" marR="0" rtl="0" algn="l">
+              <a:lnSpc>
+                <a:spcPct val="100000"/>
+              </a:lnSpc>
+              <a:spcBef>
+                <a:spcPts val="0"/>
+              </a:spcBef>
+              <a:spcAft>
+                <a:spcPts val="0"/>
+              </a:spcAft>
+              <a:buNone/>
+            </a:pPr>
+            <a:r>
+              <a:t/>
+            </a:r>
+            <a:endParaRPr b="1" i="0" sz="1400" u="none" cap="none" strike="noStrike">
+              <a:solidFill>
+                <a:srgbClr val="1A1A1A"/>
+              </a:solidFill>
+              <a:latin typeface="Arial"/>
+              <a:ea typeface="Arial"/>
+              <a:cs typeface="Arial"/>
+              <a:sym typeface="Arial"/>
+            </a:endParaRPr>
+          </a:p>
+          <a:p>
+            <a:pPr indent="0" lvl="0" marL="0" marR="0" rtl="0" algn="l">
+              <a:lnSpc>
+                <a:spcPct val="100000"/>
+              </a:lnSpc>
+              <a:spcBef>
+                <a:spcPts val="0"/>
+              </a:spcBef>
+              <a:spcAft>
+                <a:spcPts val="0"/>
+              </a:spcAft>
+              <a:buNone/>
+            </a:pPr>
+            <a:r>
+              <a:rPr b="0" i="0" lang="en-US" sz="1400" u="none" cap="none" strike="noStrike">
                 <a:solidFill>
                   <a:srgbClr val="505864"/>
                 </a:solidFill>
+                <a:latin typeface="Arial"/>
+                <a:ea typeface="Arial"/>
+                <a:cs typeface="Arial"/>
+                <a:sym typeface="Arial"/>
               </a:rPr>
               <a:t>A fluent resume can still contain broken links, chronology drift, or inflated scope.</a:t>
             </a:r>
+            <a:endParaRPr/>
           </a:p>
         </p:txBody>
       </p:sp>
@@ -4380,6 +4967,9 @@
           <a:lstStyle/>
           <a:p>
             <a:pPr indent="0" lvl="0" marL="0" marR="0" rtl="0" algn="ctr">
+              <a:lnSpc>
+                <a:spcPct val="100000"/>
+              </a:lnSpc>
               <a:spcBef>
                 <a:spcPts val="0"/>
               </a:spcBef>
@@ -4392,17 +4982,16 @@
               <a:buSzPts val="1200"/>
               <a:buFont typeface="Arial"/>
               <a:buNone/>
-              <a:defRPr sz="1400" b="0">
-                <a:solidFill>
-                  <a:srgbClr val="505864"/>
-                </a:solidFill>
-              </a:defRPr>
-            </a:pPr>
-            <a:r>
-              <a:rPr sz="1800" b="1">
+            </a:pPr>
+            <a:r>
+              <a:rPr b="1" i="0" lang="en-US" sz="1800" u="none" cap="none" strike="noStrike">
                 <a:solidFill>
                   <a:srgbClr val="166534"/>
                 </a:solidFill>
+                <a:latin typeface="Arial"/>
+                <a:ea typeface="Arial"/>
+                <a:cs typeface="Arial"/>
+                <a:sym typeface="Arial"/>
               </a:rPr>
               <a:t>Design principle</a:t>
             </a:r>
@@ -4416,17 +5005,58 @@
               <a:sym typeface="Arial"/>
             </a:endParaRPr>
           </a:p>
-          <a:p/>
-          <a:p>
-            <a:pPr algn="ctr"/>
-            <a:r>
-              <a:rPr sz="1400" b="0">
+          <a:p>
+            <a:pPr indent="0" lvl="0" marL="0" marR="0" rtl="0" algn="l">
+              <a:lnSpc>
+                <a:spcPct val="100000"/>
+              </a:lnSpc>
+              <a:spcBef>
+                <a:spcPts val="0"/>
+              </a:spcBef>
+              <a:spcAft>
+                <a:spcPts val="0"/>
+              </a:spcAft>
+              <a:buNone/>
+            </a:pPr>
+            <a:r>
+              <a:t/>
+            </a:r>
+            <a:endParaRPr b="0" i="0" sz="1600" u="none" cap="none" strike="noStrike">
+              <a:solidFill>
+                <a:schemeClr val="dk1"/>
+              </a:solidFill>
+              <a:latin typeface="Arial"/>
+              <a:ea typeface="Arial"/>
+              <a:cs typeface="Arial"/>
+              <a:sym typeface="Arial"/>
+            </a:endParaRPr>
+          </a:p>
+          <a:p>
+            <a:pPr indent="0" lvl="0" marL="0" marR="0" rtl="0" algn="ctr">
+              <a:lnSpc>
+                <a:spcPct val="100000"/>
+              </a:lnSpc>
+              <a:spcBef>
+                <a:spcPts val="0"/>
+              </a:spcBef>
+              <a:spcAft>
+                <a:spcPts val="0"/>
+              </a:spcAft>
+              <a:buNone/>
+            </a:pPr>
+            <a:r>
+              <a:rPr b="0" i="0" lang="en-US" sz="1400" u="none" cap="none" strike="noStrike">
                 <a:solidFill>
                   <a:srgbClr val="505864"/>
                 </a:solidFill>
+                <a:latin typeface="Arial"/>
+                <a:ea typeface="Arial"/>
+                <a:cs typeface="Arial"/>
+                <a:sym typeface="Arial"/>
               </a:rPr>
               <a:t>Use AI for interpretation and drafting; keep facts, opening status, and release quality behind evidence and deterministic checks.</a:t>
             </a:r>
+            <a:endParaRPr/>
           </a:p>
         </p:txBody>
       </p:sp>
@@ -4456,6 +5086,9 @@
           <a:lstStyle/>
           <a:p>
             <a:pPr indent="0" lvl="0" marL="0" marR="0" rtl="0" algn="l">
+              <a:lnSpc>
+                <a:spcPct val="100000"/>
+              </a:lnSpc>
               <a:spcBef>
                 <a:spcPts val="0"/>
               </a:spcBef>
@@ -4468,11 +5101,6 @@
               <a:buSzPts val="850"/>
               <a:buFont typeface="Arial"/>
               <a:buNone/>
-              <a:defRPr sz="900" b="0">
-                <a:solidFill>
-                  <a:srgbClr val="6E7680"/>
-                </a:solidFill>
-              </a:defRPr>
             </a:pPr>
             <a:r>
               <a:rPr b="0" i="0" lang="en-US" sz="900" u="none" cap="none" strike="noStrike">
@@ -4549,6 +5177,9 @@
           <a:lstStyle/>
           <a:p>
             <a:pPr indent="0" lvl="0" marL="0" marR="0" rtl="0" algn="l">
+              <a:lnSpc>
+                <a:spcPct val="100000"/>
+              </a:lnSpc>
               <a:spcBef>
                 <a:spcPts val="0"/>
               </a:spcBef>
@@ -4561,11 +5192,6 @@
               <a:buSzPts val="2700"/>
               <a:buFont typeface="Play"/>
               <a:buNone/>
-              <a:defRPr sz="3000" b="1">
-                <a:solidFill>
-                  <a:srgbClr val="18181B"/>
-                </a:solidFill>
-              </a:defRPr>
             </a:pPr>
             <a:r>
               <a:rPr b="1" i="0" lang="en-US" sz="3000" u="none" cap="none" strike="noStrike">
@@ -4617,6 +5243,9 @@
           <a:lstStyle/>
           <a:p>
             <a:pPr indent="0" lvl="0" marL="0" marR="0" rtl="0" algn="l">
+              <a:lnSpc>
+                <a:spcPct val="100000"/>
+              </a:lnSpc>
               <a:spcBef>
                 <a:spcPts val="0"/>
               </a:spcBef>
@@ -4629,11 +5258,6 @@
               <a:buSzPts val="1250"/>
               <a:buFont typeface="Arial"/>
               <a:buNone/>
-              <a:defRPr sz="1400" b="0">
-                <a:solidFill>
-                  <a:srgbClr val="505864"/>
-                </a:solidFill>
-              </a:defRPr>
             </a:pPr>
             <a:r>
               <a:rPr b="0" i="0" lang="en-US" sz="1400" u="none" cap="none" strike="noStrike">
@@ -4712,6 +5336,9 @@
           <a:lstStyle/>
           <a:p>
             <a:pPr indent="0" lvl="0" marL="0" marR="0" rtl="0" algn="l">
+              <a:lnSpc>
+                <a:spcPct val="100000"/>
+              </a:lnSpc>
               <a:spcBef>
                 <a:spcPts val="0"/>
               </a:spcBef>
@@ -4724,11 +5351,6 @@
               <a:buSzPts val="850"/>
               <a:buFont typeface="Arial"/>
               <a:buNone/>
-              <a:defRPr sz="900" b="0">
-                <a:solidFill>
-                  <a:srgbClr val="6E7680"/>
-                </a:solidFill>
-              </a:defRPr>
             </a:pPr>
             <a:r>
               <a:rPr b="0" i="0" lang="en-US" sz="900" u="none" cap="none" strike="noStrike">
@@ -4805,6 +5427,9 @@
           <a:lstStyle/>
           <a:p>
             <a:pPr indent="0" lvl="0" marL="0" marR="0" rtl="0" algn="l">
+              <a:lnSpc>
+                <a:spcPct val="100000"/>
+              </a:lnSpc>
               <a:spcBef>
                 <a:spcPts val="0"/>
               </a:spcBef>
@@ -4817,11 +5442,6 @@
               <a:buSzPts val="2700"/>
               <a:buFont typeface="Play"/>
               <a:buNone/>
-              <a:defRPr sz="3000" b="1">
-                <a:solidFill>
-                  <a:srgbClr val="18181B"/>
-                </a:solidFill>
-              </a:defRPr>
             </a:pPr>
             <a:r>
               <a:rPr b="1" i="0" lang="en-US" sz="3000" u="none" cap="none" strike="noStrike">
@@ -4873,6 +5493,9 @@
           <a:lstStyle/>
           <a:p>
             <a:pPr indent="0" lvl="0" marL="0" marR="0" rtl="0" algn="l">
+              <a:lnSpc>
+                <a:spcPct val="100000"/>
+              </a:lnSpc>
               <a:spcBef>
                 <a:spcPts val="0"/>
               </a:spcBef>
@@ -4885,11 +5508,6 @@
               <a:buSzPts val="1250"/>
               <a:buFont typeface="Arial"/>
               <a:buNone/>
-              <a:defRPr sz="1400" b="0">
-                <a:solidFill>
-                  <a:srgbClr val="505864"/>
-                </a:solidFill>
-              </a:defRPr>
             </a:pPr>
             <a:r>
               <a:rPr b="0" i="0" lang="en-US" sz="1400" u="none" cap="none" strike="noStrike">
@@ -4943,12 +5561,15 @@
           </a:ln>
         </p:spPr>
         <p:txBody>
-          <a:bodyPr anchorCtr="0" anchor="ctr" bIns="91440" lIns="146304" spcFirstLastPara="1" rIns="146304" wrap="square" tIns="109728">
+          <a:bodyPr anchorCtr="0" anchor="ctr" bIns="91425" lIns="146300" spcFirstLastPara="1" rIns="146300" wrap="square" tIns="109725">
             <a:normAutofit/>
           </a:bodyPr>
           <a:lstStyle/>
           <a:p>
             <a:pPr indent="0" lvl="0" marL="0" marR="0" rtl="0" algn="ctr">
+              <a:lnSpc>
+                <a:spcPct val="100000"/>
+              </a:lnSpc>
               <a:spcBef>
                 <a:spcPts val="0"/>
               </a:spcBef>
@@ -4961,21 +5582,20 @@
               <a:buSzPts val="1120"/>
               <a:buFont typeface="Arial"/>
               <a:buNone/>
-              <a:defRPr sz="1400" b="0">
-                <a:solidFill>
-                  <a:srgbClr val="505864"/>
-                </a:solidFill>
-              </a:defRPr>
-            </a:pPr>
-            <a:r>
-              <a:rPr sz="1800" b="1">
+            </a:pPr>
+            <a:r>
+              <a:rPr b="1" i="0" lang="en-US" sz="1800" u="none" cap="none" strike="noStrike">
                 <a:solidFill>
                   <a:srgbClr val="111827"/>
                 </a:solidFill>
+                <a:latin typeface="Arial"/>
+                <a:ea typeface="Arial"/>
+                <a:cs typeface="Arial"/>
+                <a:sym typeface="Arial"/>
               </a:rPr>
               <a:t>DIRECT</a:t>
             </a:r>
-            <a:endParaRPr b="1" i="0" u="none" cap="none" strike="noStrike">
+            <a:endParaRPr b="1" i="0" sz="1400" u="none" cap="none" strike="noStrike">
               <a:solidFill>
                 <a:srgbClr val="1A1A1A"/>
               </a:solidFill>
@@ -4986,18 +5606,57 @@
             </a:endParaRPr>
           </a:p>
           <a:p>
-            <a:pPr algn="ctr"/>
-          </a:p>
-          <a:p>
-            <a:pPr algn="ctr"/>
-            <a:r>
-              <a:rPr sz="1400" b="0">
+            <a:pPr indent="0" lvl="0" marL="0" marR="0" rtl="0" algn="ctr">
+              <a:lnSpc>
+                <a:spcPct val="100000"/>
+              </a:lnSpc>
+              <a:spcBef>
+                <a:spcPts val="0"/>
+              </a:spcBef>
+              <a:spcAft>
+                <a:spcPts val="0"/>
+              </a:spcAft>
+              <a:buNone/>
+            </a:pPr>
+            <a:r>
+              <a:t/>
+            </a:r>
+            <a:endParaRPr b="1" i="0" sz="1400" u="none" cap="none" strike="noStrike">
+              <a:solidFill>
+                <a:srgbClr val="1A1A1A"/>
+              </a:solidFill>
+              <a:latin typeface="Arial"/>
+              <a:ea typeface="Arial"/>
+              <a:cs typeface="Arial"/>
+              <a:sym typeface="Arial"/>
+            </a:endParaRPr>
+          </a:p>
+          <a:p>
+            <a:pPr indent="0" lvl="0" marL="0" marR="0" rtl="0" algn="ctr">
+              <a:lnSpc>
+                <a:spcPct val="100000"/>
+              </a:lnSpc>
+              <a:spcBef>
+                <a:spcPts val="0"/>
+              </a:spcBef>
+              <a:spcAft>
+                <a:spcPts val="0"/>
+              </a:spcAft>
+              <a:buNone/>
+            </a:pPr>
+            <a:r>
+              <a:rPr b="0" i="0" lang="en-US" sz="1400" u="none" cap="none" strike="noStrike">
                 <a:solidFill>
                   <a:srgbClr val="4B5563"/>
                 </a:solidFill>
+                <a:latin typeface="Arial"/>
+                <a:ea typeface="Arial"/>
+                <a:cs typeface="Arial"/>
+                <a:sym typeface="Arial"/>
               </a:rPr>
               <a:t>strong verified evidence</a:t>
             </a:r>
+            <a:endParaRPr/>
           </a:p>
         </p:txBody>
       </p:sp>
@@ -5029,12 +5688,15 @@
           </a:ln>
         </p:spPr>
         <p:txBody>
-          <a:bodyPr anchorCtr="0" anchor="ctr" bIns="91440" lIns="146304" spcFirstLastPara="1" rIns="146304" wrap="square" tIns="109728">
+          <a:bodyPr anchorCtr="0" anchor="ctr" bIns="91425" lIns="146300" spcFirstLastPara="1" rIns="146300" wrap="square" tIns="109725">
             <a:normAutofit/>
           </a:bodyPr>
           <a:lstStyle/>
           <a:p>
             <a:pPr indent="0" lvl="0" marL="0" marR="0" rtl="0" algn="ctr">
+              <a:lnSpc>
+                <a:spcPct val="100000"/>
+              </a:lnSpc>
               <a:spcBef>
                 <a:spcPts val="0"/>
               </a:spcBef>
@@ -5047,21 +5709,20 @@
               <a:buSzPts val="1120"/>
               <a:buFont typeface="Arial"/>
               <a:buNone/>
-              <a:defRPr sz="1400" b="0">
-                <a:solidFill>
-                  <a:srgbClr val="505864"/>
-                </a:solidFill>
-              </a:defRPr>
-            </a:pPr>
-            <a:r>
-              <a:rPr sz="1800" b="1">
+            </a:pPr>
+            <a:r>
+              <a:rPr b="1" i="0" lang="en-US" sz="1800" u="none" cap="none" strike="noStrike">
                 <a:solidFill>
                   <a:srgbClr val="111827"/>
                 </a:solidFill>
+                <a:latin typeface="Arial"/>
+                <a:ea typeface="Arial"/>
+                <a:cs typeface="Arial"/>
+                <a:sym typeface="Arial"/>
               </a:rPr>
               <a:t>TRANSFERABLE</a:t>
             </a:r>
-            <a:endParaRPr b="1" i="0" u="none" cap="none" strike="noStrike">
+            <a:endParaRPr b="1" i="0" sz="1400" u="none" cap="none" strike="noStrike">
               <a:solidFill>
                 <a:srgbClr val="1A1A1A"/>
               </a:solidFill>
@@ -5072,18 +5733,57 @@
             </a:endParaRPr>
           </a:p>
           <a:p>
-            <a:pPr algn="ctr"/>
-          </a:p>
-          <a:p>
-            <a:pPr algn="ctr"/>
-            <a:r>
-              <a:rPr sz="1400" b="0">
+            <a:pPr indent="0" lvl="0" marL="0" marR="0" rtl="0" algn="ctr">
+              <a:lnSpc>
+                <a:spcPct val="100000"/>
+              </a:lnSpc>
+              <a:spcBef>
+                <a:spcPts val="0"/>
+              </a:spcBef>
+              <a:spcAft>
+                <a:spcPts val="0"/>
+              </a:spcAft>
+              <a:buNone/>
+            </a:pPr>
+            <a:r>
+              <a:t/>
+            </a:r>
+            <a:endParaRPr b="1" i="0" sz="1400" u="none" cap="none" strike="noStrike">
+              <a:solidFill>
+                <a:srgbClr val="1A1A1A"/>
+              </a:solidFill>
+              <a:latin typeface="Arial"/>
+              <a:ea typeface="Arial"/>
+              <a:cs typeface="Arial"/>
+              <a:sym typeface="Arial"/>
+            </a:endParaRPr>
+          </a:p>
+          <a:p>
+            <a:pPr indent="0" lvl="0" marL="0" marR="0" rtl="0" algn="ctr">
+              <a:lnSpc>
+                <a:spcPct val="100000"/>
+              </a:lnSpc>
+              <a:spcBef>
+                <a:spcPts val="0"/>
+              </a:spcBef>
+              <a:spcAft>
+                <a:spcPts val="0"/>
+              </a:spcAft>
+              <a:buNone/>
+            </a:pPr>
+            <a:r>
+              <a:rPr b="0" i="0" lang="en-US" sz="1400" u="none" cap="none" strike="noStrike">
                 <a:solidFill>
                   <a:srgbClr val="4B5563"/>
                 </a:solidFill>
+                <a:latin typeface="Arial"/>
+                <a:ea typeface="Arial"/>
+                <a:cs typeface="Arial"/>
+                <a:sym typeface="Arial"/>
               </a:rPr>
               <a:t>adjacent evidence, described carefully</a:t>
             </a:r>
+            <a:endParaRPr/>
           </a:p>
         </p:txBody>
       </p:sp>
@@ -5115,12 +5815,15 @@
           </a:ln>
         </p:spPr>
         <p:txBody>
-          <a:bodyPr anchorCtr="0" anchor="ctr" bIns="91440" lIns="146304" spcFirstLastPara="1" rIns="146304" wrap="square" tIns="109728">
+          <a:bodyPr anchorCtr="0" anchor="ctr" bIns="91425" lIns="146300" spcFirstLastPara="1" rIns="146300" wrap="square" tIns="109725">
             <a:normAutofit/>
           </a:bodyPr>
           <a:lstStyle/>
           <a:p>
             <a:pPr indent="0" lvl="0" marL="0" marR="0" rtl="0" algn="ctr">
+              <a:lnSpc>
+                <a:spcPct val="100000"/>
+              </a:lnSpc>
               <a:spcBef>
                 <a:spcPts val="0"/>
               </a:spcBef>
@@ -5133,21 +5836,20 @@
               <a:buSzPts val="1120"/>
               <a:buFont typeface="Arial"/>
               <a:buNone/>
-              <a:defRPr sz="1400" b="0">
-                <a:solidFill>
-                  <a:srgbClr val="505864"/>
-                </a:solidFill>
-              </a:defRPr>
-            </a:pPr>
-            <a:r>
-              <a:rPr sz="1800" b="1">
+            </a:pPr>
+            <a:r>
+              <a:rPr b="1" i="0" lang="en-US" sz="1800" u="none" cap="none" strike="noStrike">
                 <a:solidFill>
                   <a:srgbClr val="111827"/>
                 </a:solidFill>
+                <a:latin typeface="Arial"/>
+                <a:ea typeface="Arial"/>
+                <a:cs typeface="Arial"/>
+                <a:sym typeface="Arial"/>
               </a:rPr>
               <a:t>UNKNOWN</a:t>
             </a:r>
-            <a:endParaRPr b="1" i="0" u="none" cap="none" strike="noStrike">
+            <a:endParaRPr b="1" i="0" sz="1400" u="none" cap="none" strike="noStrike">
               <a:solidFill>
                 <a:srgbClr val="1A1A1A"/>
               </a:solidFill>
@@ -5158,18 +5860,57 @@
             </a:endParaRPr>
           </a:p>
           <a:p>
-            <a:pPr algn="ctr"/>
-          </a:p>
-          <a:p>
-            <a:pPr algn="ctr"/>
-            <a:r>
-              <a:rPr sz="1400" b="0">
+            <a:pPr indent="0" lvl="0" marL="0" marR="0" rtl="0" algn="ctr">
+              <a:lnSpc>
+                <a:spcPct val="100000"/>
+              </a:lnSpc>
+              <a:spcBef>
+                <a:spcPts val="0"/>
+              </a:spcBef>
+              <a:spcAft>
+                <a:spcPts val="0"/>
+              </a:spcAft>
+              <a:buNone/>
+            </a:pPr>
+            <a:r>
+              <a:t/>
+            </a:r>
+            <a:endParaRPr b="1" i="0" sz="1400" u="none" cap="none" strike="noStrike">
+              <a:solidFill>
+                <a:srgbClr val="1A1A1A"/>
+              </a:solidFill>
+              <a:latin typeface="Arial"/>
+              <a:ea typeface="Arial"/>
+              <a:cs typeface="Arial"/>
+              <a:sym typeface="Arial"/>
+            </a:endParaRPr>
+          </a:p>
+          <a:p>
+            <a:pPr indent="0" lvl="0" marL="0" marR="0" rtl="0" algn="ctr">
+              <a:lnSpc>
+                <a:spcPct val="100000"/>
+              </a:lnSpc>
+              <a:spcBef>
+                <a:spcPts val="0"/>
+              </a:spcBef>
+              <a:spcAft>
+                <a:spcPts val="0"/>
+              </a:spcAft>
+              <a:buNone/>
+            </a:pPr>
+            <a:r>
+              <a:rPr b="0" i="0" lang="en-US" sz="1400" u="none" cap="none" strike="noStrike">
                 <a:solidFill>
                   <a:srgbClr val="4B5563"/>
                 </a:solidFill>
+                <a:latin typeface="Arial"/>
+                <a:ea typeface="Arial"/>
+                <a:cs typeface="Arial"/>
+                <a:sym typeface="Arial"/>
               </a:rPr>
               <a:t>not established; ask or record a gap</a:t>
             </a:r>
+            <a:endParaRPr/>
           </a:p>
         </p:txBody>
       </p:sp>
@@ -5201,12 +5942,15 @@
           </a:ln>
         </p:spPr>
         <p:txBody>
-          <a:bodyPr anchorCtr="0" anchor="ctr" bIns="91440" lIns="146304" spcFirstLastPara="1" rIns="146304" wrap="square" tIns="109728">
+          <a:bodyPr anchorCtr="0" anchor="ctr" bIns="91425" lIns="146300" spcFirstLastPara="1" rIns="146300" wrap="square" tIns="109725">
             <a:normAutofit/>
           </a:bodyPr>
           <a:lstStyle/>
           <a:p>
             <a:pPr indent="0" lvl="0" marL="0" marR="0" rtl="0" algn="ctr">
+              <a:lnSpc>
+                <a:spcPct val="100000"/>
+              </a:lnSpc>
               <a:spcBef>
                 <a:spcPts val="0"/>
               </a:spcBef>
@@ -5219,21 +5963,20 @@
               <a:buSzPts val="1120"/>
               <a:buFont typeface="Arial"/>
               <a:buNone/>
-              <a:defRPr sz="1400" b="0">
-                <a:solidFill>
-                  <a:srgbClr val="505864"/>
-                </a:solidFill>
-              </a:defRPr>
-            </a:pPr>
-            <a:r>
-              <a:rPr sz="1800" b="1">
+            </a:pPr>
+            <a:r>
+              <a:rPr b="1" i="0" lang="en-US" sz="1800" u="none" cap="none" strike="noStrike">
                 <a:solidFill>
                   <a:srgbClr val="111827"/>
                 </a:solidFill>
+                <a:latin typeface="Arial"/>
+                <a:ea typeface="Arial"/>
+                <a:cs typeface="Arial"/>
+                <a:sym typeface="Arial"/>
               </a:rPr>
               <a:t>UNMET</a:t>
             </a:r>
-            <a:endParaRPr b="1" i="0" u="none" cap="none" strike="noStrike">
+            <a:endParaRPr b="1" i="0" sz="1400" u="none" cap="none" strike="noStrike">
               <a:solidFill>
                 <a:srgbClr val="1A1A1A"/>
               </a:solidFill>
@@ -5244,18 +5987,57 @@
             </a:endParaRPr>
           </a:p>
           <a:p>
-            <a:pPr algn="ctr"/>
-          </a:p>
-          <a:p>
-            <a:pPr algn="ctr"/>
-            <a:r>
-              <a:rPr sz="1400" b="0">
+            <a:pPr indent="0" lvl="0" marL="0" marR="0" rtl="0" algn="ctr">
+              <a:lnSpc>
+                <a:spcPct val="100000"/>
+              </a:lnSpc>
+              <a:spcBef>
+                <a:spcPts val="0"/>
+              </a:spcBef>
+              <a:spcAft>
+                <a:spcPts val="0"/>
+              </a:spcAft>
+              <a:buNone/>
+            </a:pPr>
+            <a:r>
+              <a:t/>
+            </a:r>
+            <a:endParaRPr b="1" i="0" sz="1400" u="none" cap="none" strike="noStrike">
+              <a:solidFill>
+                <a:srgbClr val="1A1A1A"/>
+              </a:solidFill>
+              <a:latin typeface="Arial"/>
+              <a:ea typeface="Arial"/>
+              <a:cs typeface="Arial"/>
+              <a:sym typeface="Arial"/>
+            </a:endParaRPr>
+          </a:p>
+          <a:p>
+            <a:pPr indent="0" lvl="0" marL="0" marR="0" rtl="0" algn="ctr">
+              <a:lnSpc>
+                <a:spcPct val="100000"/>
+              </a:lnSpc>
+              <a:spcBef>
+                <a:spcPts val="0"/>
+              </a:spcBef>
+              <a:spcAft>
+                <a:spcPts val="0"/>
+              </a:spcAft>
+              <a:buNone/>
+            </a:pPr>
+            <a:r>
+              <a:rPr b="0" i="0" lang="en-US" sz="1400" u="none" cap="none" strike="noStrike">
                 <a:solidFill>
                   <a:srgbClr val="4B5563"/>
                 </a:solidFill>
+                <a:latin typeface="Arial"/>
+                <a:ea typeface="Arial"/>
+                <a:cs typeface="Arial"/>
+                <a:sym typeface="Arial"/>
               </a:rPr>
               <a:t>confirmed missing requirement</a:t>
             </a:r>
+            <a:endParaRPr/>
           </a:p>
         </p:txBody>
       </p:sp>
@@ -5319,6 +6101,9 @@
           <a:lstStyle/>
           <a:p>
             <a:pPr indent="0" lvl="0" marL="0" marR="0" rtl="0" algn="ctr">
+              <a:lnSpc>
+                <a:spcPct val="100000"/>
+              </a:lnSpc>
               <a:spcBef>
                 <a:spcPts val="0"/>
               </a:spcBef>
@@ -5331,11 +6116,6 @@
               <a:buSzPts val="1100"/>
               <a:buFont typeface="Arial"/>
               <a:buNone/>
-              <a:defRPr sz="1400" b="0">
-                <a:solidFill>
-                  <a:srgbClr val="18181B"/>
-                </a:solidFill>
-              </a:defRPr>
             </a:pPr>
             <a:r>
               <a:rPr b="1" i="0" lang="en-US" sz="1400" u="none" cap="none" strike="noStrike">
@@ -5372,7 +6152,7 @@
         </p:nvCxnSpPr>
         <p:spPr>
           <a:xfrm>
-            <a:off x="2765932" y="3246120"/>
+            <a:off x="2765933" y="3246120"/>
             <a:ext cx="1143000" cy="0"/>
           </a:xfrm>
           <a:prstGeom prst="straightConnector1">
@@ -5424,6 +6204,9 @@
           <a:lstStyle/>
           <a:p>
             <a:pPr indent="0" lvl="0" marL="0" marR="0" rtl="0" algn="ctr">
+              <a:lnSpc>
+                <a:spcPct val="100000"/>
+              </a:lnSpc>
               <a:spcBef>
                 <a:spcPts val="0"/>
               </a:spcBef>
@@ -5436,11 +6219,6 @@
               <a:buSzPts val="1100"/>
               <a:buFont typeface="Arial"/>
               <a:buNone/>
-              <a:defRPr sz="1400" b="0">
-                <a:solidFill>
-                  <a:srgbClr val="18181B"/>
-                </a:solidFill>
-              </a:defRPr>
             </a:pPr>
             <a:r>
               <a:rPr b="1" i="0" lang="en-US" sz="1400" u="none" cap="none" strike="noStrike">
@@ -5529,6 +6307,9 @@
           <a:lstStyle/>
           <a:p>
             <a:pPr indent="0" lvl="0" marL="0" marR="0" rtl="0" algn="ctr">
+              <a:lnSpc>
+                <a:spcPct val="100000"/>
+              </a:lnSpc>
               <a:spcBef>
                 <a:spcPts val="0"/>
               </a:spcBef>
@@ -5541,11 +6322,6 @@
               <a:buSzPts val="1100"/>
               <a:buFont typeface="Arial"/>
               <a:buNone/>
-              <a:defRPr sz="1400" b="0">
-                <a:solidFill>
-                  <a:srgbClr val="18181B"/>
-                </a:solidFill>
-              </a:defRPr>
             </a:pPr>
             <a:r>
               <a:rPr b="1" i="0" lang="en-US" sz="1400" u="none" cap="none" strike="noStrike">
@@ -5634,6 +6410,9 @@
           <a:lstStyle/>
           <a:p>
             <a:pPr indent="0" lvl="0" marL="0" marR="0" rtl="0" algn="ctr">
+              <a:lnSpc>
+                <a:spcPct val="100000"/>
+              </a:lnSpc>
               <a:spcBef>
                 <a:spcPts val="0"/>
               </a:spcBef>
@@ -5646,11 +6425,6 @@
               <a:buSzPts val="1100"/>
               <a:buFont typeface="Arial"/>
               <a:buNone/>
-              <a:defRPr sz="1400" b="0">
-                <a:solidFill>
-                  <a:srgbClr val="18181B"/>
-                </a:solidFill>
-              </a:defRPr>
             </a:pPr>
             <a:r>
               <a:rPr b="1" i="0" lang="en-US" sz="1400" u="none" cap="none" strike="noStrike">
@@ -5702,6 +6476,9 @@
           <a:lstStyle/>
           <a:p>
             <a:pPr indent="0" lvl="0" marL="0" marR="0" rtl="0" algn="ctr">
+              <a:lnSpc>
+                <a:spcPct val="100000"/>
+              </a:lnSpc>
               <a:spcBef>
                 <a:spcPts val="0"/>
               </a:spcBef>
@@ -5714,11 +6491,6 @@
               <a:buSzPts val="1800"/>
               <a:buFont typeface="Arial"/>
               <a:buNone/>
-              <a:defRPr sz="1400" b="0">
-                <a:solidFill>
-                  <a:srgbClr val="505864"/>
-                </a:solidFill>
-              </a:defRPr>
             </a:pPr>
             <a:r>
               <a:rPr b="0" i="0" lang="en-US" sz="1400" u="none" cap="none" strike="noStrike">
@@ -5770,6 +6542,9 @@
           <a:lstStyle/>
           <a:p>
             <a:pPr indent="0" lvl="0" marL="0" marR="0" rtl="0" algn="l">
+              <a:lnSpc>
+                <a:spcPct val="100000"/>
+              </a:lnSpc>
               <a:spcBef>
                 <a:spcPts val="0"/>
               </a:spcBef>
@@ -5782,11 +6557,6 @@
               <a:buSzPts val="850"/>
               <a:buFont typeface="Arial"/>
               <a:buNone/>
-              <a:defRPr sz="900" b="0">
-                <a:solidFill>
-                  <a:srgbClr val="6E7680"/>
-                </a:solidFill>
-              </a:defRPr>
             </a:pPr>
             <a:r>
               <a:rPr b="0" i="0" lang="en-US" sz="900" u="none" cap="none" strike="noStrike">
@@ -5863,6 +6633,9 @@
           <a:lstStyle/>
           <a:p>
             <a:pPr indent="0" lvl="0" marL="0" marR="0" rtl="0" algn="l">
+              <a:lnSpc>
+                <a:spcPct val="100000"/>
+              </a:lnSpc>
               <a:spcBef>
                 <a:spcPts val="0"/>
               </a:spcBef>
@@ -5875,11 +6648,6 @@
               <a:buSzPts val="2700"/>
               <a:buFont typeface="Play"/>
               <a:buNone/>
-              <a:defRPr sz="3000" b="1">
-                <a:solidFill>
-                  <a:srgbClr val="18181B"/>
-                </a:solidFill>
-              </a:defRPr>
             </a:pPr>
             <a:r>
               <a:rPr b="1" i="0" lang="en-US" sz="3000" u="none" cap="none" strike="noStrike">
@@ -5931,6 +6699,9 @@
           <a:lstStyle/>
           <a:p>
             <a:pPr indent="0" lvl="0" marL="0" marR="0" rtl="0" algn="l">
+              <a:lnSpc>
+                <a:spcPct val="100000"/>
+              </a:lnSpc>
               <a:spcBef>
                 <a:spcPts val="0"/>
               </a:spcBef>
@@ -5943,11 +6714,6 @@
               <a:buSzPts val="1250"/>
               <a:buFont typeface="Arial"/>
               <a:buNone/>
-              <a:defRPr sz="1400" b="0">
-                <a:solidFill>
-                  <a:srgbClr val="505864"/>
-                </a:solidFill>
-              </a:defRPr>
             </a:pPr>
             <a:r>
               <a:rPr b="0" i="0" lang="en-US" sz="1400" u="none" cap="none" strike="noStrike">
@@ -6007,6 +6773,9 @@
           <a:lstStyle/>
           <a:p>
             <a:pPr indent="0" lvl="0" marL="0" marR="0" rtl="0" algn="ctr">
+              <a:lnSpc>
+                <a:spcPct val="100000"/>
+              </a:lnSpc>
               <a:spcBef>
                 <a:spcPts val="0"/>
               </a:spcBef>
@@ -6019,11 +6788,6 @@
               <a:buSzPts val="1100"/>
               <a:buFont typeface="Arial"/>
               <a:buNone/>
-              <a:defRPr sz="1400" b="0">
-                <a:solidFill>
-                  <a:srgbClr val="505864"/>
-                </a:solidFill>
-              </a:defRPr>
             </a:pPr>
             <a:r>
               <a:rPr b="1" i="0" lang="en-US" sz="1450" u="none" cap="none" strike="noStrike">
@@ -6075,6 +6839,9 @@
           <a:lstStyle/>
           <a:p>
             <a:pPr indent="0" lvl="0" marL="0" marR="0" rtl="0" algn="l">
+              <a:lnSpc>
+                <a:spcPct val="100000"/>
+              </a:lnSpc>
               <a:spcBef>
                 <a:spcPts val="0"/>
               </a:spcBef>
@@ -6087,11 +6854,6 @@
               <a:buSzPts val="1450"/>
               <a:buFont typeface="Arial"/>
               <a:buNone/>
-              <a:defRPr sz="1400" b="0">
-                <a:solidFill>
-                  <a:srgbClr val="505864"/>
-                </a:solidFill>
-              </a:defRPr>
             </a:pPr>
             <a:r>
               <a:rPr b="0" i="0" lang="en-US" sz="1400" u="none" cap="none" strike="noStrike">
@@ -6151,6 +6913,9 @@
           <a:lstStyle/>
           <a:p>
             <a:pPr indent="0" lvl="0" marL="0" marR="0" rtl="0" algn="ctr">
+              <a:lnSpc>
+                <a:spcPct val="100000"/>
+              </a:lnSpc>
               <a:spcBef>
                 <a:spcPts val="0"/>
               </a:spcBef>
@@ -6163,11 +6928,6 @@
               <a:buSzPts val="1100"/>
               <a:buFont typeface="Arial"/>
               <a:buNone/>
-              <a:defRPr sz="1400" b="0">
-                <a:solidFill>
-                  <a:srgbClr val="505864"/>
-                </a:solidFill>
-              </a:defRPr>
             </a:pPr>
             <a:r>
               <a:rPr b="1" i="0" lang="en-US" sz="1450" u="none" cap="none" strike="noStrike">
@@ -6219,6 +6979,9 @@
           <a:lstStyle/>
           <a:p>
             <a:pPr indent="0" lvl="0" marL="0" marR="0" rtl="0" algn="l">
+              <a:lnSpc>
+                <a:spcPct val="100000"/>
+              </a:lnSpc>
               <a:spcBef>
                 <a:spcPts val="0"/>
               </a:spcBef>
@@ -6231,11 +6994,6 @@
               <a:buSzPts val="1450"/>
               <a:buFont typeface="Arial"/>
               <a:buNone/>
-              <a:defRPr sz="1400" b="0">
-                <a:solidFill>
-                  <a:srgbClr val="505864"/>
-                </a:solidFill>
-              </a:defRPr>
             </a:pPr>
             <a:r>
               <a:rPr b="0" i="0" lang="en-US" sz="1400" u="none" cap="none" strike="noStrike">
@@ -6295,6 +7053,9 @@
           <a:lstStyle/>
           <a:p>
             <a:pPr indent="0" lvl="0" marL="0" marR="0" rtl="0" algn="ctr">
+              <a:lnSpc>
+                <a:spcPct val="100000"/>
+              </a:lnSpc>
               <a:spcBef>
                 <a:spcPts val="0"/>
               </a:spcBef>
@@ -6307,11 +7068,6 @@
               <a:buSzPts val="1100"/>
               <a:buFont typeface="Arial"/>
               <a:buNone/>
-              <a:defRPr sz="1400" b="0">
-                <a:solidFill>
-                  <a:srgbClr val="505864"/>
-                </a:solidFill>
-              </a:defRPr>
             </a:pPr>
             <a:r>
               <a:rPr b="1" i="0" lang="en-US" sz="1450" u="none" cap="none" strike="noStrike">
@@ -6363,6 +7119,9 @@
           <a:lstStyle/>
           <a:p>
             <a:pPr indent="0" lvl="0" marL="0" marR="0" rtl="0" algn="l">
+              <a:lnSpc>
+                <a:spcPct val="100000"/>
+              </a:lnSpc>
               <a:spcBef>
                 <a:spcPts val="0"/>
               </a:spcBef>
@@ -6375,11 +7134,6 @@
               <a:buSzPts val="1450"/>
               <a:buFont typeface="Arial"/>
               <a:buNone/>
-              <a:defRPr sz="1400" b="0">
-                <a:solidFill>
-                  <a:srgbClr val="505864"/>
-                </a:solidFill>
-              </a:defRPr>
             </a:pPr>
             <a:r>
               <a:rPr b="0" i="0" lang="en-US" sz="1400" u="none" cap="none" strike="noStrike">
@@ -6439,6 +7193,9 @@
           <a:lstStyle/>
           <a:p>
             <a:pPr indent="0" lvl="0" marL="0" marR="0" rtl="0" algn="ctr">
+              <a:lnSpc>
+                <a:spcPct val="100000"/>
+              </a:lnSpc>
               <a:spcBef>
                 <a:spcPts val="0"/>
               </a:spcBef>
@@ -6451,11 +7208,6 @@
               <a:buSzPts val="1100"/>
               <a:buFont typeface="Arial"/>
               <a:buNone/>
-              <a:defRPr sz="1400" b="0">
-                <a:solidFill>
-                  <a:srgbClr val="505864"/>
-                </a:solidFill>
-              </a:defRPr>
             </a:pPr>
             <a:r>
               <a:rPr b="1" i="0" lang="en-US" sz="1450" u="none" cap="none" strike="noStrike">
@@ -6507,6 +7259,9 @@
           <a:lstStyle/>
           <a:p>
             <a:pPr indent="0" lvl="0" marL="0" marR="0" rtl="0" algn="l">
+              <a:lnSpc>
+                <a:spcPct val="100000"/>
+              </a:lnSpc>
               <a:spcBef>
                 <a:spcPts val="0"/>
               </a:spcBef>
@@ -6519,11 +7274,6 @@
               <a:buSzPts val="1450"/>
               <a:buFont typeface="Arial"/>
               <a:buNone/>
-              <a:defRPr sz="1400" b="0">
-                <a:solidFill>
-                  <a:srgbClr val="505864"/>
-                </a:solidFill>
-              </a:defRPr>
             </a:pPr>
             <a:r>
               <a:rPr b="0" i="0" lang="en-US" sz="1400" u="none" cap="none" strike="noStrike">
@@ -6583,6 +7333,9 @@
           <a:lstStyle/>
           <a:p>
             <a:pPr indent="0" lvl="0" marL="0" marR="0" rtl="0" algn="ctr">
+              <a:lnSpc>
+                <a:spcPct val="100000"/>
+              </a:lnSpc>
               <a:spcBef>
                 <a:spcPts val="0"/>
               </a:spcBef>
@@ -6595,11 +7348,6 @@
               <a:buSzPts val="1100"/>
               <a:buFont typeface="Arial"/>
               <a:buNone/>
-              <a:defRPr sz="1400" b="0">
-                <a:solidFill>
-                  <a:srgbClr val="505864"/>
-                </a:solidFill>
-              </a:defRPr>
             </a:pPr>
             <a:r>
               <a:rPr b="1" i="0" lang="en-US" sz="1450" u="none" cap="none" strike="noStrike">
@@ -6651,6 +7399,9 @@
           <a:lstStyle/>
           <a:p>
             <a:pPr indent="0" lvl="0" marL="0" marR="0" rtl="0" algn="l">
+              <a:lnSpc>
+                <a:spcPct val="100000"/>
+              </a:lnSpc>
               <a:spcBef>
                 <a:spcPts val="0"/>
               </a:spcBef>
@@ -6663,11 +7414,6 @@
               <a:buSzPts val="1450"/>
               <a:buFont typeface="Arial"/>
               <a:buNone/>
-              <a:defRPr sz="1400" b="0">
-                <a:solidFill>
-                  <a:srgbClr val="505864"/>
-                </a:solidFill>
-              </a:defRPr>
             </a:pPr>
             <a:r>
               <a:rPr b="0" i="0" lang="en-US" sz="1400" u="none" cap="none" strike="noStrike">
@@ -6727,6 +7473,9 @@
           <a:lstStyle/>
           <a:p>
             <a:pPr indent="0" lvl="0" marL="0" marR="0" rtl="0" algn="ctr">
+              <a:lnSpc>
+                <a:spcPct val="100000"/>
+              </a:lnSpc>
               <a:spcBef>
                 <a:spcPts val="0"/>
               </a:spcBef>
@@ -6739,11 +7488,6 @@
               <a:buSzPts val="1300"/>
               <a:buFont typeface="Arial"/>
               <a:buNone/>
-              <a:defRPr sz="1400" b="0">
-                <a:solidFill>
-                  <a:srgbClr val="505864"/>
-                </a:solidFill>
-              </a:defRPr>
             </a:pPr>
             <a:r>
               <a:rPr b="1" i="0" lang="en-US" sz="1800" u="none" cap="none" strike="noStrike">
@@ -6769,6 +7513,9 @@
           </a:p>
           <a:p>
             <a:pPr indent="0" lvl="0" marL="0" marR="0" rtl="0" algn="ctr">
+              <a:lnSpc>
+                <a:spcPct val="100000"/>
+              </a:lnSpc>
               <a:spcBef>
                 <a:spcPts val="0"/>
               </a:spcBef>
@@ -6797,6 +7544,9 @@
           </a:p>
           <a:p>
             <a:pPr indent="0" lvl="0" marL="91440" marR="91440" rtl="0" algn="l">
+              <a:lnSpc>
+                <a:spcPct val="100000"/>
+              </a:lnSpc>
               <a:spcBef>
                 <a:spcPts val="0"/>
               </a:spcBef>
@@ -6809,14 +7559,9 @@
               <a:buSzPts val="1300"/>
               <a:buFont typeface="Arial"/>
               <a:buNone/>
-              <a:defRPr sz="1400" b="0">
-                <a:solidFill>
-                  <a:srgbClr val="505864"/>
-                </a:solidFill>
-              </a:defRPr>
-            </a:pPr>
-            <a:r>
-              <a:rPr b="0" i="0" lang="en-US" u="none" cap="none" strike="noStrike" sz="1400">
+            </a:pPr>
+            <a:r>
+              <a:rPr b="0" i="0" lang="en-US" sz="1400" u="none" cap="none" strike="noStrike">
                 <a:solidFill>
                   <a:srgbClr val="505864"/>
                 </a:solidFill>
@@ -6827,7 +7572,7 @@
               </a:rPr>
               <a:t>This is not a single resume prompt. </a:t>
             </a:r>
-            <a:endParaRPr b="0" i="0" u="none" cap="none" strike="noStrike">
+            <a:endParaRPr b="0" i="0" sz="1400" u="none" cap="none" strike="noStrike">
               <a:solidFill>
                 <a:srgbClr val="5F6672"/>
               </a:solidFill>
@@ -6839,6 +7584,9 @@
           </a:p>
           <a:p>
             <a:pPr indent="0" lvl="0" marL="91440" marR="91440" rtl="0" algn="l">
+              <a:lnSpc>
+                <a:spcPct val="100000"/>
+              </a:lnSpc>
               <a:spcBef>
                 <a:spcPts val="0"/>
               </a:spcBef>
@@ -6855,14 +7603,21 @@
             <a:r>
               <a:t/>
             </a:r>
-            <a:endParaRPr>
+            <a:endParaRPr b="0" i="0" sz="1400" u="none" cap="none" strike="noStrike">
               <a:solidFill>
                 <a:srgbClr val="5F6672"/>
               </a:solidFill>
+              <a:latin typeface="Arial"/>
+              <a:ea typeface="Arial"/>
+              <a:cs typeface="Arial"/>
+              <a:sym typeface="Arial"/>
             </a:endParaRPr>
           </a:p>
           <a:p>
             <a:pPr indent="0" lvl="0" marL="91440" marR="91440" rtl="0" algn="l">
+              <a:lnSpc>
+                <a:spcPct val="100000"/>
+              </a:lnSpc>
               <a:spcBef>
                 <a:spcPts val="0"/>
               </a:spcBef>
@@ -6875,14 +7630,9 @@
               <a:buSzPts val="1300"/>
               <a:buFont typeface="Arial"/>
               <a:buNone/>
-              <a:defRPr sz="1400" b="0">
-                <a:solidFill>
-                  <a:srgbClr val="505864"/>
-                </a:solidFill>
-              </a:defRPr>
-            </a:pPr>
-            <a:r>
-              <a:rPr b="0" i="0" lang="en-US" u="none" cap="none" strike="noStrike" sz="1400">
+            </a:pPr>
+            <a:r>
+              <a:rPr b="0" i="0" lang="en-US" sz="1400" u="none" cap="none" strike="noStrike">
                 <a:solidFill>
                   <a:srgbClr val="505864"/>
                 </a:solidFill>
@@ -6893,7 +7643,7 @@
               </a:rPr>
               <a:t>It is a stateful agent workflow with explicit evidence boundaries, opening verification, validation, and durable application history.</a:t>
             </a:r>
-            <a:endParaRPr b="0" i="0" u="none" cap="none" strike="noStrike">
+            <a:endParaRPr b="0" i="0" sz="1400" u="none" cap="none" strike="noStrike">
               <a:solidFill>
                 <a:schemeClr val="dk1"/>
               </a:solidFill>
@@ -6931,6 +7681,9 @@
           <a:lstStyle/>
           <a:p>
             <a:pPr indent="0" lvl="0" marL="0" marR="0" rtl="0" algn="l">
+              <a:lnSpc>
+                <a:spcPct val="100000"/>
+              </a:lnSpc>
               <a:spcBef>
                 <a:spcPts val="0"/>
               </a:spcBef>
@@ -6943,11 +7696,6 @@
               <a:buSzPts val="850"/>
               <a:buFont typeface="Arial"/>
               <a:buNone/>
-              <a:defRPr sz="900" b="0">
-                <a:solidFill>
-                  <a:srgbClr val="6E7680"/>
-                </a:solidFill>
-              </a:defRPr>
             </a:pPr>
             <a:r>
               <a:rPr b="0" i="0" lang="en-US" sz="900" u="none" cap="none" strike="noStrike">
@@ -6982,18 +7730,25 @@
 </file>
 
 <file path=ppt/slides/slide6.xml><?xml version="1.0" encoding="utf-8"?>
-<p:sld xmlns:a="http://schemas.openxmlformats.org/drawingml/2006/main" xmlns:p="http://schemas.openxmlformats.org/presentationml/2006/main" xmlns:r="http://schemas.openxmlformats.org/officeDocument/2006/relationships">
+<p:sld xmlns:a="http://schemas.openxmlformats.org/drawingml/2006/main" xmlns:r="http://schemas.openxmlformats.org/officeDocument/2006/relationships" xmlns:mc="http://schemas.openxmlformats.org/markup-compatibility/2006" xmlns:mv="urn:schemas-microsoft-com:mac:vml" xmlns:p="http://schemas.openxmlformats.org/presentationml/2006/main" xmlns:c="http://schemas.openxmlformats.org/drawingml/2006/chart" xmlns:dgm="http://schemas.openxmlformats.org/drawingml/2006/diagram" xmlns:o="urn:schemas-microsoft-com:office:office" xmlns:v="urn:schemas-microsoft-com:vml" xmlns:pvml="urn:schemas-microsoft-com:office:powerpoint" xmlns:com="http://schemas.openxmlformats.org/drawingml/2006/compatibility" xmlns:p14="http://schemas.microsoft.com/office/powerpoint/2010/main" xmlns:p15="http://schemas.microsoft.com/office/powerpoint/2012/main" xmlns:ahyp="http://schemas.microsoft.com/office/drawing/2018/hyperlinkcolor">
   <p:cSld>
     <p:spTree>
       <p:nvGrpSpPr>
-        <p:cNvPr id="1" name=""/>
+        <p:cNvPr id="95" name="Shape 95"/>
         <p:cNvGrpSpPr/>
         <p:nvPr/>
       </p:nvGrpSpPr>
-      <p:grpSpPr/>
+      <p:grpSpPr>
+        <a:xfrm>
+          <a:off x="0" y="0"/>
+          <a:ext cx="0" cy="0"/>
+          <a:chOff x="0" y="0"/>
+          <a:chExt cx="0" cy="0"/>
+        </a:xfrm>
+      </p:grpSpPr>
       <p:sp>
         <p:nvSpPr>
-          <p:cNvPr id="2" name="TextBox 1"/>
+          <p:cNvPr id="96" name="Google Shape;96;p8"/>
           <p:cNvSpPr txBox="1"/>
           <p:nvPr/>
         </p:nvSpPr>
@@ -7006,35 +7761,47 @@
             <a:avLst/>
           </a:prstGeom>
           <a:noFill/>
+          <a:ln>
+            <a:noFill/>
+          </a:ln>
         </p:spPr>
         <p:txBody>
-          <a:bodyPr wrap="square">
+          <a:bodyPr anchorCtr="0" anchor="t" bIns="45700" lIns="91425" spcFirstLastPara="1" rIns="91425" wrap="square" tIns="45700">
             <a:spAutoFit/>
           </a:bodyPr>
           <a:lstStyle/>
           <a:p>
-            <a:pPr>
-              <a:defRPr sz="3000" b="1">
+            <a:pPr indent="0" lvl="0" marL="0" marR="0" rtl="0" algn="l">
+              <a:lnSpc>
+                <a:spcPct val="100000"/>
+              </a:lnSpc>
+              <a:spcBef>
+                <a:spcPts val="0"/>
+              </a:spcBef>
+              <a:spcAft>
+                <a:spcPts val="0"/>
+              </a:spcAft>
+              <a:buNone/>
+            </a:pPr>
+            <a:r>
+              <a:rPr b="1" i="0" lang="en-US" sz="3000" u="none" cap="none" strike="noStrike">
                 <a:solidFill>
                   <a:srgbClr val="18181B"/>
                 </a:solidFill>
-              </a:defRPr>
-            </a:pPr>
-            <a:r>
-              <a:rPr b="1" sz="3000">
-                <a:solidFill>
-                  <a:srgbClr val="18181B"/>
-                </a:solidFill>
-                <a:latin typeface="Aptos Display"/>
+                <a:latin typeface="Play"/>
+                <a:ea typeface="Play"/>
+                <a:cs typeface="Play"/>
+                <a:sym typeface="Play"/>
               </a:rPr>
               <a:t>Design choices</a:t>
             </a:r>
+            <a:endParaRPr/>
           </a:p>
         </p:txBody>
       </p:sp>
       <p:sp>
         <p:nvSpPr>
-          <p:cNvPr id="3" name="TextBox 2"/>
+          <p:cNvPr id="97" name="Google Shape;97;p8"/>
           <p:cNvSpPr txBox="1"/>
           <p:nvPr/>
         </p:nvSpPr>
@@ -7047,35 +7814,47 @@
             <a:avLst/>
           </a:prstGeom>
           <a:noFill/>
+          <a:ln>
+            <a:noFill/>
+          </a:ln>
         </p:spPr>
         <p:txBody>
-          <a:bodyPr wrap="square">
+          <a:bodyPr anchorCtr="0" anchor="t" bIns="45700" lIns="91425" spcFirstLastPara="1" rIns="91425" wrap="square" tIns="45700">
             <a:spAutoFit/>
           </a:bodyPr>
           <a:lstStyle/>
           <a:p>
-            <a:pPr>
-              <a:defRPr sz="1400" b="0">
+            <a:pPr indent="0" lvl="0" marL="0" marR="0" rtl="0" algn="l">
+              <a:lnSpc>
+                <a:spcPct val="100000"/>
+              </a:lnSpc>
+              <a:spcBef>
+                <a:spcPts val="0"/>
+              </a:spcBef>
+              <a:spcAft>
+                <a:spcPts val="0"/>
+              </a:spcAft>
+              <a:buNone/>
+            </a:pPr>
+            <a:r>
+              <a:rPr b="0" i="0" lang="en-US" sz="1400" u="none" cap="none" strike="noStrike">
                 <a:solidFill>
                   <a:srgbClr val="505864"/>
                 </a:solidFill>
-              </a:defRPr>
-            </a:pPr>
-            <a:r>
-              <a:rPr sz="1400" b="0">
-                <a:solidFill>
-                  <a:srgbClr val="505864"/>
-                </a:solidFill>
-                <a:latin typeface="Aptos"/>
+                <a:latin typeface="Arial"/>
+                <a:ea typeface="Arial"/>
+                <a:cs typeface="Arial"/>
+                <a:sym typeface="Arial"/>
               </a:rPr>
               <a:t>The agent is designed around failure modes, not just prompt convenience.</a:t>
             </a:r>
+            <a:endParaRPr/>
           </a:p>
         </p:txBody>
       </p:sp>
       <p:sp>
         <p:nvSpPr>
-          <p:cNvPr id="4" name="TextBox 3"/>
+          <p:cNvPr id="98" name="Google Shape;98;p8"/>
           <p:cNvSpPr txBox="1"/>
           <p:nvPr/>
         </p:nvSpPr>
@@ -7088,35 +7867,47 @@
             <a:avLst/>
           </a:prstGeom>
           <a:noFill/>
+          <a:ln>
+            <a:noFill/>
+          </a:ln>
         </p:spPr>
         <p:txBody>
-          <a:bodyPr wrap="square">
+          <a:bodyPr anchorCtr="0" anchor="t" bIns="45700" lIns="91425" spcFirstLastPara="1" rIns="91425" wrap="square" tIns="45700">
             <a:spAutoFit/>
           </a:bodyPr>
           <a:lstStyle/>
           <a:p>
-            <a:pPr>
-              <a:defRPr sz="900" b="0">
+            <a:pPr indent="0" lvl="0" marL="0" marR="0" rtl="0" algn="l">
+              <a:lnSpc>
+                <a:spcPct val="100000"/>
+              </a:lnSpc>
+              <a:spcBef>
+                <a:spcPts val="0"/>
+              </a:spcBef>
+              <a:spcAft>
+                <a:spcPts val="0"/>
+              </a:spcAft>
+              <a:buNone/>
+            </a:pPr>
+            <a:r>
+              <a:rPr b="0" i="0" lang="en-US" sz="900" u="none" cap="none" strike="noStrike">
                 <a:solidFill>
                   <a:srgbClr val="6E7680"/>
                 </a:solidFill>
-              </a:defRPr>
-            </a:pPr>
-            <a:r>
-              <a:rPr sz="900" b="0">
-                <a:solidFill>
-                  <a:srgbClr val="6E7680"/>
-                </a:solidFill>
-                <a:latin typeface="Aptos"/>
+                <a:latin typeface="Arial"/>
+                <a:ea typeface="Arial"/>
+                <a:cs typeface="Arial"/>
+                <a:sym typeface="Arial"/>
               </a:rPr>
               <a:t>treeflow-ai / career-application-agent</a:t>
             </a:r>
+            <a:endParaRPr/>
           </a:p>
         </p:txBody>
       </p:sp>
       <p:sp>
         <p:nvSpPr>
-          <p:cNvPr id="5" name="Rounded Rectangle 4"/>
+          <p:cNvPr id="99" name="Google Shape;99;p8"/>
           <p:cNvSpPr/>
           <p:nvPr/>
         </p:nvSpPr>
@@ -7126,87 +7917,124 @@
             <a:ext cx="3429000" cy="3520440"/>
           </a:xfrm>
           <a:prstGeom prst="roundRect">
-            <a:avLst/>
+            <a:avLst>
+              <a:gd fmla="val 16667" name="adj"/>
+            </a:avLst>
           </a:prstGeom>
           <a:solidFill>
             <a:srgbClr val="FFFFFF"/>
           </a:solidFill>
-          <a:ln w="25400">
+          <a:ln cap="flat" cmpd="sng" w="25400">
             <a:solidFill>
               <a:srgbClr val="15803D"/>
             </a:solidFill>
+            <a:prstDash val="solid"/>
+            <a:round/>
+            <a:headEnd len="sm" w="sm" type="none"/>
+            <a:tailEnd len="sm" w="sm" type="none"/>
           </a:ln>
+          <a:effectLst>
+            <a:outerShdw blurRad="40000" rotWithShape="0" dir="5400000" dist="23000">
+              <a:srgbClr val="000000">
+                <a:alpha val="34902"/>
+              </a:srgbClr>
+            </a:outerShdw>
+          </a:effectLst>
         </p:spPr>
-        <p:style>
-          <a:lnRef idx="1">
-            <a:schemeClr val="accent1"/>
-          </a:lnRef>
-          <a:fillRef idx="3">
-            <a:schemeClr val="accent1"/>
-          </a:fillRef>
-          <a:effectRef idx="2">
-            <a:schemeClr val="accent1"/>
-          </a:effectRef>
-          <a:fontRef idx="minor">
-            <a:schemeClr val="lt1"/>
-          </a:fontRef>
-        </p:style>
         <p:txBody>
-          <a:bodyPr rtlCol="0" anchor="ctr" lIns="146304" rIns="146304" tIns="109728" wrap="square" bIns="91440"/>
+          <a:bodyPr anchorCtr="0" anchor="ctr" bIns="91425" lIns="146300" spcFirstLastPara="1" rIns="146300" wrap="square" tIns="109725">
+            <a:noAutofit/>
+          </a:bodyPr>
           <a:lstStyle/>
           <a:p>
-            <a:pPr algn="l">
-              <a:defRPr sz="1800" b="1">
-                <a:solidFill>
-                  <a:srgbClr val="DC2626"/>
-                </a:solidFill>
-              </a:defRPr>
-            </a:pPr>
-            <a:r>
-              <a:rPr b="1" sz="1800">
+            <a:pPr indent="0" lvl="0" marL="0" marR="0" rtl="0" algn="l">
+              <a:lnSpc>
+                <a:spcPct val="100000"/>
+              </a:lnSpc>
+              <a:spcBef>
+                <a:spcPts val="0"/>
+              </a:spcBef>
+              <a:spcAft>
+                <a:spcPts val="0"/>
+              </a:spcAft>
+              <a:buNone/>
+            </a:pPr>
+            <a:r>
+              <a:rPr b="1" i="0" lang="en-US" sz="1800" u="none" cap="none" strike="noStrike">
                 <a:solidFill>
                   <a:srgbClr val="111827"/>
                 </a:solidFill>
-                <a:latin typeface="Aptos"/>
+                <a:latin typeface="Arial"/>
+                <a:ea typeface="Arial"/>
+                <a:cs typeface="Arial"/>
+                <a:sym typeface="Arial"/>
               </a:rPr>
-              <a:t>1. </a:t>
-            </a:r>
-            <a:r>
-              <a:rPr b="1" sz="1800">
-                <a:solidFill>
-                  <a:srgbClr val="111827"/>
-                </a:solidFill>
-                <a:latin typeface="Aptos"/>
-              </a:rPr>
-              <a:t>Ground claims in evidence</a:t>
-            </a:r>
-          </a:p>
-          <a:p>
-            <a:pPr algn="l">
+              <a:t>1. Ground claims in evidence</a:t>
+            </a:r>
+            <a:endParaRPr b="1" i="0" sz="1800" u="none" cap="none" strike="noStrike">
+              <a:solidFill>
+                <a:srgbClr val="111827"/>
+              </a:solidFill>
+              <a:latin typeface="Arial"/>
+              <a:ea typeface="Arial"/>
+              <a:cs typeface="Arial"/>
+              <a:sym typeface="Arial"/>
+            </a:endParaRPr>
+          </a:p>
+          <a:p>
+            <a:pPr indent="0" lvl="0" marL="0" marR="0" rtl="0" algn="l">
+              <a:lnSpc>
+                <a:spcPct val="100000"/>
+              </a:lnSpc>
+              <a:spcBef>
+                <a:spcPts val="0"/>
+              </a:spcBef>
+              <a:spcAft>
+                <a:spcPts val="0"/>
+              </a:spcAft>
+              <a:buNone/>
+            </a:pPr>
+            <a:r>
+              <a:t/>
+            </a:r>
+            <a:endParaRPr b="1" sz="1800">
+              <a:solidFill>
+                <a:srgbClr val="111827"/>
+              </a:solidFill>
+            </a:endParaRPr>
+          </a:p>
+          <a:p>
+            <a:pPr indent="0" lvl="0" marL="0" marR="0" rtl="0" algn="l">
+              <a:lnSpc>
+                <a:spcPct val="100000"/>
+              </a:lnSpc>
               <a:spcBef>
                 <a:spcPts val="500"/>
               </a:spcBef>
-              <a:defRPr sz="1400" b="0">
-                <a:solidFill>
-                  <a:srgbClr val="313944"/>
-                </a:solidFill>
-              </a:defRPr>
-            </a:pPr>
-            <a:r>
-              <a:rPr sz="1400" b="0">
+              <a:spcAft>
+                <a:spcPts val="0"/>
+              </a:spcAft>
+              <a:buNone/>
+            </a:pPr>
+            <a:r>
+              <a:rPr b="0" i="0" lang="en-US" sz="1400" u="none" cap="none" strike="noStrike">
                 <a:solidFill>
                   <a:srgbClr val="4B5563"/>
                 </a:solidFill>
-                <a:latin typeface="Aptos"/>
+                <a:latin typeface="Arial"/>
+                <a:ea typeface="Arial"/>
+                <a:cs typeface="Arial"/>
+                <a:sym typeface="Arial"/>
               </a:rPr>
               <a:t>The job description can influence selection and wording, but it cannot create candidate facts. Claims must trace back to verified or user-confirmed evidence.</a:t>
             </a:r>
+            <a:endParaRPr/>
           </a:p>
         </p:txBody>
       </p:sp>
       <p:sp>
         <p:nvSpPr>
-          <p:cNvPr id="6" name="Rounded Rectangle 5"/>
+          <p:cNvPr id="100" name="Google Shape;100;p8"/>
           <p:cNvSpPr/>
           <p:nvPr/>
         </p:nvSpPr>
@@ -7216,87 +8044,124 @@
             <a:ext cx="3429000" cy="3520440"/>
           </a:xfrm>
           <a:prstGeom prst="roundRect">
-            <a:avLst/>
+            <a:avLst>
+              <a:gd fmla="val 16667" name="adj"/>
+            </a:avLst>
           </a:prstGeom>
           <a:solidFill>
             <a:srgbClr val="FFFFFF"/>
           </a:solidFill>
-          <a:ln w="25400">
+          <a:ln cap="flat" cmpd="sng" w="25400">
             <a:solidFill>
               <a:srgbClr val="2563EB"/>
             </a:solidFill>
+            <a:prstDash val="solid"/>
+            <a:round/>
+            <a:headEnd len="sm" w="sm" type="none"/>
+            <a:tailEnd len="sm" w="sm" type="none"/>
           </a:ln>
+          <a:effectLst>
+            <a:outerShdw blurRad="40000" rotWithShape="0" dir="5400000" dist="23000">
+              <a:srgbClr val="000000">
+                <a:alpha val="34902"/>
+              </a:srgbClr>
+            </a:outerShdw>
+          </a:effectLst>
         </p:spPr>
-        <p:style>
-          <a:lnRef idx="1">
-            <a:schemeClr val="accent1"/>
-          </a:lnRef>
-          <a:fillRef idx="3">
-            <a:schemeClr val="accent1"/>
-          </a:fillRef>
-          <a:effectRef idx="2">
-            <a:schemeClr val="accent1"/>
-          </a:effectRef>
-          <a:fontRef idx="minor">
-            <a:schemeClr val="lt1"/>
-          </a:fontRef>
-        </p:style>
         <p:txBody>
-          <a:bodyPr rtlCol="0" anchor="ctr" lIns="146304" rIns="146304" tIns="109728" wrap="square" bIns="91440"/>
+          <a:bodyPr anchorCtr="0" anchor="ctr" bIns="91425" lIns="146300" spcFirstLastPara="1" rIns="146300" wrap="square" tIns="109725">
+            <a:noAutofit/>
+          </a:bodyPr>
           <a:lstStyle/>
           <a:p>
-            <a:pPr algn="l">
-              <a:defRPr sz="1800" b="1">
-                <a:solidFill>
-                  <a:srgbClr val="EA580C"/>
-                </a:solidFill>
-              </a:defRPr>
-            </a:pPr>
-            <a:r>
-              <a:rPr b="1" sz="1800">
+            <a:pPr indent="0" lvl="0" marL="0" marR="0" rtl="0" algn="l">
+              <a:lnSpc>
+                <a:spcPct val="100000"/>
+              </a:lnSpc>
+              <a:spcBef>
+                <a:spcPts val="0"/>
+              </a:spcBef>
+              <a:spcAft>
+                <a:spcPts val="0"/>
+              </a:spcAft>
+              <a:buNone/>
+            </a:pPr>
+            <a:r>
+              <a:rPr b="1" i="0" lang="en-US" sz="1800" u="none" cap="none" strike="noStrike">
                 <a:solidFill>
                   <a:srgbClr val="111827"/>
                 </a:solidFill>
-                <a:latin typeface="Aptos"/>
+                <a:latin typeface="Arial"/>
+                <a:ea typeface="Arial"/>
+                <a:cs typeface="Arial"/>
+                <a:sym typeface="Arial"/>
               </a:rPr>
-              <a:t>2. </a:t>
-            </a:r>
-            <a:r>
-              <a:rPr b="1" sz="1800">
-                <a:solidFill>
-                  <a:srgbClr val="111827"/>
-                </a:solidFill>
-                <a:latin typeface="Aptos"/>
-              </a:rPr>
-              <a:t>Separate reasoning from invariants</a:t>
-            </a:r>
-          </a:p>
-          <a:p>
-            <a:pPr algn="l">
+              <a:t>2. Separate reasoning from invariants</a:t>
+            </a:r>
+            <a:endParaRPr b="1" i="0" sz="1800" u="none" cap="none" strike="noStrike">
+              <a:solidFill>
+                <a:srgbClr val="111827"/>
+              </a:solidFill>
+              <a:latin typeface="Arial"/>
+              <a:ea typeface="Arial"/>
+              <a:cs typeface="Arial"/>
+              <a:sym typeface="Arial"/>
+            </a:endParaRPr>
+          </a:p>
+          <a:p>
+            <a:pPr indent="0" lvl="0" marL="0" marR="0" rtl="0" algn="l">
+              <a:lnSpc>
+                <a:spcPct val="100000"/>
+              </a:lnSpc>
+              <a:spcBef>
+                <a:spcPts val="0"/>
+              </a:spcBef>
+              <a:spcAft>
+                <a:spcPts val="0"/>
+              </a:spcAft>
+              <a:buNone/>
+            </a:pPr>
+            <a:r>
+              <a:t/>
+            </a:r>
+            <a:endParaRPr b="1" sz="1800">
+              <a:solidFill>
+                <a:srgbClr val="111827"/>
+              </a:solidFill>
+            </a:endParaRPr>
+          </a:p>
+          <a:p>
+            <a:pPr indent="0" lvl="0" marL="0" marR="0" rtl="0" algn="l">
+              <a:lnSpc>
+                <a:spcPct val="100000"/>
+              </a:lnSpc>
               <a:spcBef>
                 <a:spcPts val="500"/>
               </a:spcBef>
-              <a:defRPr sz="1400" b="0">
-                <a:solidFill>
-                  <a:srgbClr val="313944"/>
-                </a:solidFill>
-              </a:defRPr>
-            </a:pPr>
-            <a:r>
-              <a:rPr sz="1400" b="0">
+              <a:spcAft>
+                <a:spcPts val="0"/>
+              </a:spcAft>
+              <a:buNone/>
+            </a:pPr>
+            <a:r>
+              <a:rPr b="0" i="0" lang="en-US" sz="1400" u="none" cap="none" strike="noStrike">
                 <a:solidFill>
                   <a:srgbClr val="4B5563"/>
                 </a:solidFill>
-                <a:latin typeface="Aptos"/>
+                <a:latin typeface="Arial"/>
+                <a:ea typeface="Arial"/>
+                <a:cs typeface="Arial"/>
+                <a:sym typeface="Arial"/>
               </a:rPr>
               <a:t>LLM skills handle interpretation, fit analysis, and drafting. Code enforces hard boundaries such as evidence IDs, link integrity, privacy, and state rules.</a:t>
             </a:r>
+            <a:endParaRPr/>
           </a:p>
         </p:txBody>
       </p:sp>
       <p:sp>
         <p:nvSpPr>
-          <p:cNvPr id="7" name="Rounded Rectangle 6"/>
+          <p:cNvPr id="101" name="Google Shape;101;p8"/>
           <p:cNvSpPr/>
           <p:nvPr/>
         </p:nvSpPr>
@@ -7306,87 +8171,124 @@
             <a:ext cx="3429000" cy="3520440"/>
           </a:xfrm>
           <a:prstGeom prst="roundRect">
-            <a:avLst/>
+            <a:avLst>
+              <a:gd fmla="val 16667" name="adj"/>
+            </a:avLst>
           </a:prstGeom>
           <a:solidFill>
             <a:srgbClr val="FFFFFF"/>
           </a:solidFill>
-          <a:ln w="25400">
+          <a:ln cap="flat" cmpd="sng" w="25400">
             <a:solidFill>
               <a:srgbClr val="B45309"/>
             </a:solidFill>
+            <a:prstDash val="solid"/>
+            <a:round/>
+            <a:headEnd len="sm" w="sm" type="none"/>
+            <a:tailEnd len="sm" w="sm" type="none"/>
           </a:ln>
+          <a:effectLst>
+            <a:outerShdw blurRad="40000" rotWithShape="0" dir="5400000" dist="23000">
+              <a:srgbClr val="000000">
+                <a:alpha val="34902"/>
+              </a:srgbClr>
+            </a:outerShdw>
+          </a:effectLst>
         </p:spPr>
-        <p:style>
-          <a:lnRef idx="1">
-            <a:schemeClr val="accent1"/>
-          </a:lnRef>
-          <a:fillRef idx="3">
-            <a:schemeClr val="accent1"/>
-          </a:fillRef>
-          <a:effectRef idx="2">
-            <a:schemeClr val="accent1"/>
-          </a:effectRef>
-          <a:fontRef idx="minor">
-            <a:schemeClr val="lt1"/>
-          </a:fontRef>
-        </p:style>
         <p:txBody>
-          <a:bodyPr rtlCol="0" anchor="ctr" lIns="146304" rIns="146304" tIns="109728" wrap="square" bIns="91440"/>
+          <a:bodyPr anchorCtr="0" anchor="ctr" bIns="91425" lIns="146300" spcFirstLastPara="1" rIns="146300" wrap="square" tIns="109725">
+            <a:noAutofit/>
+          </a:bodyPr>
           <a:lstStyle/>
           <a:p>
-            <a:pPr algn="l">
-              <a:defRPr sz="1800" b="1">
-                <a:solidFill>
-                  <a:srgbClr val="7C3AED"/>
-                </a:solidFill>
-              </a:defRPr>
-            </a:pPr>
-            <a:r>
-              <a:rPr b="1" sz="1800">
+            <a:pPr indent="0" lvl="0" marL="0" marR="0" rtl="0" algn="l">
+              <a:lnSpc>
+                <a:spcPct val="100000"/>
+              </a:lnSpc>
+              <a:spcBef>
+                <a:spcPts val="0"/>
+              </a:spcBef>
+              <a:spcAft>
+                <a:spcPts val="0"/>
+              </a:spcAft>
+              <a:buNone/>
+            </a:pPr>
+            <a:r>
+              <a:rPr b="1" i="0" lang="en-US" sz="1800" u="none" cap="none" strike="noStrike">
                 <a:solidFill>
                   <a:srgbClr val="111827"/>
                 </a:solidFill>
-                <a:latin typeface="Aptos"/>
+                <a:latin typeface="Arial"/>
+                <a:ea typeface="Arial"/>
+                <a:cs typeface="Arial"/>
+                <a:sym typeface="Arial"/>
               </a:rPr>
-              <a:t>3. </a:t>
-            </a:r>
-            <a:r>
-              <a:rPr b="1" sz="1800">
-                <a:solidFill>
-                  <a:srgbClr val="111827"/>
-                </a:solidFill>
-                <a:latin typeface="Aptos"/>
-              </a:rPr>
-              <a:t>Fail to unknown</a:t>
-            </a:r>
-          </a:p>
-          <a:p>
-            <a:pPr algn="l">
+              <a:t>3. Fail to unknown</a:t>
+            </a:r>
+            <a:endParaRPr b="1" i="0" sz="1800" u="none" cap="none" strike="noStrike">
+              <a:solidFill>
+                <a:srgbClr val="111827"/>
+              </a:solidFill>
+              <a:latin typeface="Arial"/>
+              <a:ea typeface="Arial"/>
+              <a:cs typeface="Arial"/>
+              <a:sym typeface="Arial"/>
+            </a:endParaRPr>
+          </a:p>
+          <a:p>
+            <a:pPr indent="0" lvl="0" marL="0" marR="0" rtl="0" algn="l">
+              <a:lnSpc>
+                <a:spcPct val="100000"/>
+              </a:lnSpc>
+              <a:spcBef>
+                <a:spcPts val="0"/>
+              </a:spcBef>
+              <a:spcAft>
+                <a:spcPts val="0"/>
+              </a:spcAft>
+              <a:buNone/>
+            </a:pPr>
+            <a:r>
+              <a:t/>
+            </a:r>
+            <a:endParaRPr b="1" sz="1800">
+              <a:solidFill>
+                <a:srgbClr val="111827"/>
+              </a:solidFill>
+            </a:endParaRPr>
+          </a:p>
+          <a:p>
+            <a:pPr indent="0" lvl="0" marL="0" marR="0" rtl="0" algn="l">
+              <a:lnSpc>
+                <a:spcPct val="100000"/>
+              </a:lnSpc>
               <a:spcBef>
                 <a:spcPts val="500"/>
               </a:spcBef>
-              <a:defRPr sz="1400" b="0">
-                <a:solidFill>
-                  <a:srgbClr val="313944"/>
-                </a:solidFill>
-              </a:defRPr>
-            </a:pPr>
-            <a:r>
-              <a:rPr sz="1400" b="0">
+              <a:spcAft>
+                <a:spcPts val="0"/>
+              </a:spcAft>
+              <a:buNone/>
+            </a:pPr>
+            <a:r>
+              <a:rPr b="0" i="0" lang="en-US" sz="1400" u="none" cap="none" strike="noStrike">
                 <a:solidFill>
                   <a:srgbClr val="4B5563"/>
                 </a:solidFill>
-                <a:latin typeface="Aptos"/>
+                <a:latin typeface="Arial"/>
+                <a:ea typeface="Arial"/>
+                <a:cs typeface="Arial"/>
+                <a:sym typeface="Arial"/>
               </a:rPr>
               <a:t>If a job opening, tool claim, metric, date, or qualification cannot be verified, the system records a gap instead of inventing certainty.</a:t>
             </a:r>
+            <a:endParaRPr/>
           </a:p>
         </p:txBody>
       </p:sp>
       <p:sp>
         <p:nvSpPr>
-          <p:cNvPr id="8" name="TextBox 7"/>
+          <p:cNvPr id="102" name="Google Shape;102;p8"/>
           <p:cNvSpPr txBox="1"/>
           <p:nvPr/>
         </p:nvSpPr>
@@ -7401,27 +8303,47 @@
           <a:solidFill>
             <a:srgbClr val="F0F7F3"/>
           </a:solidFill>
-          <a:ln w="19050">
+          <a:ln cap="flat" cmpd="sng" w="19050">
             <a:solidFill>
               <a:srgbClr val="15803D"/>
             </a:solidFill>
+            <a:prstDash val="solid"/>
+            <a:round/>
+            <a:headEnd len="sm" w="sm" type="none"/>
+            <a:tailEnd len="sm" w="sm" type="none"/>
           </a:ln>
         </p:spPr>
         <p:txBody>
-          <a:bodyPr wrap="square" anchor="ctr" lIns="137160" rIns="137160">
+          <a:bodyPr anchorCtr="0" anchor="ctr" bIns="45700" lIns="137150" spcFirstLastPara="1" rIns="137150" wrap="square" tIns="45700">
             <a:spAutoFit/>
           </a:bodyPr>
           <a:lstStyle/>
           <a:p>
-            <a:pPr algn="ctr"/>
-            <a:r>
-              <a:rPr sz="1400" b="1">
+            <a:pPr indent="0" lvl="0" marL="0" marR="0" rtl="0" algn="ctr">
+              <a:lnSpc>
+                <a:spcPct val="100000"/>
+              </a:lnSpc>
+              <a:spcBef>
+                <a:spcPts val="0"/>
+              </a:spcBef>
+              <a:spcAft>
+                <a:spcPts val="0"/>
+              </a:spcAft>
+              <a:buNone/>
+            </a:pPr>
+            <a:r>
+              <a:rPr b="1" i="0" lang="en-US" sz="1400" u="none" cap="none" strike="noStrike">
                 <a:solidFill>
                   <a:srgbClr val="15803D"/>
                 </a:solidFill>
+                <a:latin typeface="Arial"/>
+                <a:ea typeface="Arial"/>
+                <a:cs typeface="Arial"/>
+                <a:sym typeface="Arial"/>
               </a:rPr>
               <a:t>Use AI for judgment and drafting; use checks for facts, safety, and release quality.</a:t>
             </a:r>
+            <a:endParaRPr/>
           </a:p>
         </p:txBody>
       </p:sp>
@@ -7434,18 +8356,25 @@
 </file>
 
 <file path=ppt/slides/slide7.xml><?xml version="1.0" encoding="utf-8"?>
-<p:sld xmlns:a="http://schemas.openxmlformats.org/drawingml/2006/main" xmlns:p="http://schemas.openxmlformats.org/presentationml/2006/main" xmlns:r="http://schemas.openxmlformats.org/officeDocument/2006/relationships">
+<p:sld xmlns:a="http://schemas.openxmlformats.org/drawingml/2006/main" xmlns:r="http://schemas.openxmlformats.org/officeDocument/2006/relationships" xmlns:mc="http://schemas.openxmlformats.org/markup-compatibility/2006" xmlns:mv="urn:schemas-microsoft-com:mac:vml" xmlns:p="http://schemas.openxmlformats.org/presentationml/2006/main" xmlns:c="http://schemas.openxmlformats.org/drawingml/2006/chart" xmlns:dgm="http://schemas.openxmlformats.org/drawingml/2006/diagram" xmlns:o="urn:schemas-microsoft-com:office:office" xmlns:v="urn:schemas-microsoft-com:vml" xmlns:pvml="urn:schemas-microsoft-com:office:powerpoint" xmlns:com="http://schemas.openxmlformats.org/drawingml/2006/compatibility" xmlns:p14="http://schemas.microsoft.com/office/powerpoint/2010/main" xmlns:p15="http://schemas.microsoft.com/office/powerpoint/2012/main" xmlns:ahyp="http://schemas.microsoft.com/office/drawing/2018/hyperlinkcolor">
   <p:cSld>
     <p:spTree>
       <p:nvGrpSpPr>
-        <p:cNvPr id="1" name=""/>
+        <p:cNvPr id="106" name="Shape 106"/>
         <p:cNvGrpSpPr/>
         <p:nvPr/>
       </p:nvGrpSpPr>
-      <p:grpSpPr/>
+      <p:grpSpPr>
+        <a:xfrm>
+          <a:off x="0" y="0"/>
+          <a:ext cx="0" cy="0"/>
+          <a:chOff x="0" y="0"/>
+          <a:chExt cx="0" cy="0"/>
+        </a:xfrm>
+      </p:grpSpPr>
       <p:sp>
         <p:nvSpPr>
-          <p:cNvPr id="2" name="TextBox 1"/>
+          <p:cNvPr id="107" name="Google Shape;107;p9"/>
           <p:cNvSpPr txBox="1"/>
           <p:nvPr/>
         </p:nvSpPr>
@@ -7458,35 +8387,47 @@
             <a:avLst/>
           </a:prstGeom>
           <a:noFill/>
+          <a:ln>
+            <a:noFill/>
+          </a:ln>
         </p:spPr>
         <p:txBody>
-          <a:bodyPr wrap="square">
+          <a:bodyPr anchorCtr="0" anchor="t" bIns="45700" lIns="91425" spcFirstLastPara="1" rIns="91425" wrap="square" tIns="45700">
             <a:spAutoFit/>
           </a:bodyPr>
           <a:lstStyle/>
           <a:p>
-            <a:pPr>
-              <a:defRPr sz="3000" b="1">
+            <a:pPr indent="0" lvl="0" marL="0" marR="0" rtl="0" algn="l">
+              <a:lnSpc>
+                <a:spcPct val="100000"/>
+              </a:lnSpc>
+              <a:spcBef>
+                <a:spcPts val="0"/>
+              </a:spcBef>
+              <a:spcAft>
+                <a:spcPts val="0"/>
+              </a:spcAft>
+              <a:buNone/>
+            </a:pPr>
+            <a:r>
+              <a:rPr b="1" i="0" lang="en-US" sz="3000" u="none" cap="none" strike="noStrike">
                 <a:solidFill>
                   <a:srgbClr val="18181B"/>
                 </a:solidFill>
-              </a:defRPr>
-            </a:pPr>
-            <a:r>
-              <a:rPr b="1" sz="3000">
-                <a:solidFill>
-                  <a:srgbClr val="18181B"/>
-                </a:solidFill>
-                <a:latin typeface="Aptos Display"/>
+                <a:latin typeface="Play"/>
+                <a:ea typeface="Play"/>
+                <a:cs typeface="Play"/>
+                <a:sym typeface="Play"/>
               </a:rPr>
               <a:t>How to use and verify it</a:t>
             </a:r>
+            <a:endParaRPr/>
           </a:p>
         </p:txBody>
       </p:sp>
       <p:sp>
         <p:nvSpPr>
-          <p:cNvPr id="3" name="TextBox 2"/>
+          <p:cNvPr id="108" name="Google Shape;108;p9"/>
           <p:cNvSpPr txBox="1"/>
           <p:nvPr/>
         </p:nvSpPr>
@@ -7499,35 +8440,47 @@
             <a:avLst/>
           </a:prstGeom>
           <a:noFill/>
+          <a:ln>
+            <a:noFill/>
+          </a:ln>
         </p:spPr>
         <p:txBody>
-          <a:bodyPr wrap="square">
+          <a:bodyPr anchorCtr="0" anchor="t" bIns="45700" lIns="91425" spcFirstLastPara="1" rIns="91425" wrap="square" tIns="45700">
             <a:spAutoFit/>
           </a:bodyPr>
           <a:lstStyle/>
           <a:p>
-            <a:pPr>
-              <a:defRPr sz="1400" b="0">
+            <a:pPr indent="0" lvl="0" marL="0" marR="0" rtl="0" algn="l">
+              <a:lnSpc>
+                <a:spcPct val="100000"/>
+              </a:lnSpc>
+              <a:spcBef>
+                <a:spcPts val="0"/>
+              </a:spcBef>
+              <a:spcAft>
+                <a:spcPts val="0"/>
+              </a:spcAft>
+              <a:buNone/>
+            </a:pPr>
+            <a:r>
+              <a:rPr b="0" i="0" lang="en-US" sz="1400" u="none" cap="none" strike="noStrike">
                 <a:solidFill>
                   <a:srgbClr val="505864"/>
                 </a:solidFill>
-              </a:defRPr>
-            </a:pPr>
-            <a:r>
-              <a:rPr sz="1400" b="0">
-                <a:solidFill>
-                  <a:srgbClr val="505864"/>
-                </a:solidFill>
-                <a:latin typeface="Aptos"/>
+                <a:latin typeface="Arial"/>
+                <a:ea typeface="Arial"/>
+                <a:cs typeface="Arial"/>
+                <a:sym typeface="Arial"/>
               </a:rPr>
               <a:t>The repository is meant to be inspected through example data, workflow traces, and release gates.</a:t>
             </a:r>
+            <a:endParaRPr/>
           </a:p>
         </p:txBody>
       </p:sp>
       <p:sp>
         <p:nvSpPr>
-          <p:cNvPr id="4" name="TextBox 3"/>
+          <p:cNvPr id="109" name="Google Shape;109;p9"/>
           <p:cNvSpPr txBox="1"/>
           <p:nvPr/>
         </p:nvSpPr>
@@ -7540,42 +8493,54 @@
             <a:avLst/>
           </a:prstGeom>
           <a:noFill/>
+          <a:ln>
+            <a:noFill/>
+          </a:ln>
         </p:spPr>
         <p:txBody>
-          <a:bodyPr wrap="square">
+          <a:bodyPr anchorCtr="0" anchor="t" bIns="45700" lIns="91425" spcFirstLastPara="1" rIns="91425" wrap="square" tIns="45700">
             <a:spAutoFit/>
           </a:bodyPr>
           <a:lstStyle/>
           <a:p>
-            <a:pPr>
-              <a:defRPr sz="900" b="0">
+            <a:pPr indent="0" lvl="0" marL="0" marR="0" rtl="0" algn="l">
+              <a:lnSpc>
+                <a:spcPct val="100000"/>
+              </a:lnSpc>
+              <a:spcBef>
+                <a:spcPts val="0"/>
+              </a:spcBef>
+              <a:spcAft>
+                <a:spcPts val="0"/>
+              </a:spcAft>
+              <a:buNone/>
+            </a:pPr>
+            <a:r>
+              <a:rPr b="0" i="0" lang="en-US" sz="900" u="none" cap="none" strike="noStrike">
                 <a:solidFill>
                   <a:srgbClr val="6E7680"/>
                 </a:solidFill>
-              </a:defRPr>
-            </a:pPr>
-            <a:r>
-              <a:rPr sz="900" b="0">
-                <a:solidFill>
-                  <a:srgbClr val="6E7680"/>
-                </a:solidFill>
-                <a:latin typeface="Aptos"/>
+                <a:latin typeface="Arial"/>
+                <a:ea typeface="Arial"/>
+                <a:cs typeface="Arial"/>
+                <a:sym typeface="Arial"/>
               </a:rPr>
               <a:t>treeflow-ai / career-application-agent</a:t>
             </a:r>
+            <a:endParaRPr/>
           </a:p>
         </p:txBody>
       </p:sp>
       <p:sp>
         <p:nvSpPr>
-          <p:cNvPr id="5" name="TextBox 4"/>
+          <p:cNvPr id="110" name="Google Shape;110;p9"/>
           <p:cNvSpPr txBox="1"/>
           <p:nvPr/>
         </p:nvSpPr>
         <p:spPr>
           <a:xfrm>
             <a:off x="685800" y="1325880"/>
-            <a:ext cx="5074920" cy="4434840"/>
+            <a:ext cx="5074800" cy="4525200"/>
           </a:xfrm>
           <a:prstGeom prst="rect">
             <a:avLst/>
@@ -7583,145 +8548,380 @@
           <a:solidFill>
             <a:srgbClr val="FFFFFF"/>
           </a:solidFill>
-          <a:ln w="25400">
+          <a:ln cap="flat" cmpd="sng" w="25400">
             <a:solidFill>
               <a:srgbClr val="2563EB"/>
             </a:solidFill>
+            <a:prstDash val="solid"/>
+            <a:round/>
+            <a:headEnd len="sm" w="sm" type="none"/>
+            <a:tailEnd len="sm" w="sm" type="none"/>
           </a:ln>
         </p:spPr>
         <p:txBody>
-          <a:bodyPr wrap="square">
+          <a:bodyPr anchorCtr="0" anchor="t" bIns="45700" lIns="91425" spcFirstLastPara="1" rIns="91425" wrap="square" tIns="45700">
             <a:spAutoFit/>
           </a:bodyPr>
           <a:lstStyle/>
           <a:p>
-            <a:pPr algn="l">
-              <a:defRPr sz="1800" b="1">
-                <a:solidFill>
-                  <a:srgbClr val="166534"/>
-                </a:solidFill>
-              </a:defRPr>
-            </a:pPr>
-            <a:r>
-              <a:rPr b="1" sz="1800">
+            <a:pPr indent="0" lvl="0" marL="0" marR="0" rtl="0" algn="l">
+              <a:lnSpc>
+                <a:spcPct val="100000"/>
+              </a:lnSpc>
+              <a:spcBef>
+                <a:spcPts val="0"/>
+              </a:spcBef>
+              <a:spcAft>
+                <a:spcPts val="0"/>
+              </a:spcAft>
+              <a:buNone/>
+            </a:pPr>
+            <a:r>
+              <a:t/>
+            </a:r>
+            <a:endParaRPr b="1" sz="1800">
+              <a:solidFill>
+                <a:srgbClr val="111827"/>
+              </a:solidFill>
+            </a:endParaRPr>
+          </a:p>
+          <a:p>
+            <a:pPr indent="0" lvl="0" marL="0" marR="0" rtl="0" algn="l">
+              <a:lnSpc>
+                <a:spcPct val="100000"/>
+              </a:lnSpc>
+              <a:spcBef>
+                <a:spcPts val="0"/>
+              </a:spcBef>
+              <a:spcAft>
+                <a:spcPts val="0"/>
+              </a:spcAft>
+              <a:buNone/>
+            </a:pPr>
+            <a:r>
+              <a:rPr b="1" i="0" lang="en-US" sz="1800" u="none" cap="none" strike="noStrike">
                 <a:solidFill>
                   <a:srgbClr val="111827"/>
                 </a:solidFill>
-                <a:latin typeface="Aptos"/>
+                <a:latin typeface="Arial"/>
+                <a:ea typeface="Arial"/>
+                <a:cs typeface="Arial"/>
+                <a:sym typeface="Arial"/>
               </a:rPr>
               <a:t>Use path</a:t>
             </a:r>
-          </a:p>
-          <a:p>
-            <a:pPr algn="l">
+            <a:endParaRPr/>
+          </a:p>
+          <a:p>
+            <a:pPr indent="0" lvl="0" marL="0" marR="0" rtl="0" algn="l">
+              <a:lnSpc>
+                <a:spcPct val="100000"/>
+              </a:lnSpc>
               <a:spcBef>
                 <a:spcPts val="700"/>
               </a:spcBef>
-              <a:defRPr sz="1400" b="0">
-                <a:solidFill>
-                  <a:srgbClr val="313944"/>
-                </a:solidFill>
-              </a:defRPr>
-            </a:pPr>
-            <a:r>
-              <a:rPr sz="1400" b="0">
+              <a:spcAft>
+                <a:spcPts val="0"/>
+              </a:spcAft>
+              <a:buNone/>
+            </a:pPr>
+            <a:r>
+              <a:t/>
+            </a:r>
+            <a:endParaRPr>
+              <a:solidFill>
+                <a:srgbClr val="4B5563"/>
+              </a:solidFill>
+            </a:endParaRPr>
+          </a:p>
+          <a:p>
+            <a:pPr indent="0" lvl="0" marL="0" marR="0" rtl="0" algn="l">
+              <a:lnSpc>
+                <a:spcPct val="100000"/>
+              </a:lnSpc>
+              <a:spcBef>
+                <a:spcPts val="700"/>
+              </a:spcBef>
+              <a:spcAft>
+                <a:spcPts val="0"/>
+              </a:spcAft>
+              <a:buNone/>
+            </a:pPr>
+            <a:r>
+              <a:rPr b="0" i="0" lang="en-US" sz="1400" u="none" cap="none" strike="noStrike">
                 <a:solidFill>
                   <a:srgbClr val="4B5563"/>
                 </a:solidFill>
-                <a:latin typeface="Aptos"/>
+                <a:latin typeface="Arial"/>
+                <a:ea typeface="Arial"/>
+                <a:cs typeface="Arial"/>
+                <a:sym typeface="Arial"/>
               </a:rPr>
               <a:t>• Copy example profile/evidence files into local ignored files.</a:t>
             </a:r>
-          </a:p>
-          <a:p>
-            <a:pPr algn="l">
+            <a:endParaRPr b="0" i="0" sz="1400" u="none" cap="none" strike="noStrike">
+              <a:solidFill>
+                <a:srgbClr val="4B5563"/>
+              </a:solidFill>
+              <a:latin typeface="Arial"/>
+              <a:ea typeface="Arial"/>
+              <a:cs typeface="Arial"/>
+              <a:sym typeface="Arial"/>
+            </a:endParaRPr>
+          </a:p>
+          <a:p>
+            <a:pPr indent="0" lvl="0" marL="0" marR="0" rtl="0" algn="l">
+              <a:lnSpc>
+                <a:spcPct val="100000"/>
+              </a:lnSpc>
               <a:spcBef>
                 <a:spcPts val="700"/>
               </a:spcBef>
-              <a:defRPr sz="1400" b="0">
-                <a:solidFill>
-                  <a:srgbClr val="313944"/>
-                </a:solidFill>
-              </a:defRPr>
-            </a:pPr>
-            <a:r>
-              <a:rPr sz="1400" b="0">
+              <a:spcAft>
+                <a:spcPts val="0"/>
+              </a:spcAft>
+              <a:buNone/>
+            </a:pPr>
+            <a:r>
+              <a:t/>
+            </a:r>
+            <a:endParaRPr>
+              <a:solidFill>
+                <a:srgbClr val="4B5563"/>
+              </a:solidFill>
+            </a:endParaRPr>
+          </a:p>
+          <a:p>
+            <a:pPr indent="0" lvl="0" marL="0" marR="0" rtl="0" algn="l">
+              <a:lnSpc>
+                <a:spcPct val="100000"/>
+              </a:lnSpc>
+              <a:spcBef>
+                <a:spcPts val="700"/>
+              </a:spcBef>
+              <a:spcAft>
+                <a:spcPts val="0"/>
+              </a:spcAft>
+              <a:buNone/>
+            </a:pPr>
+            <a:r>
+              <a:rPr b="0" i="0" lang="en-US" sz="1400" u="none" cap="none" strike="noStrike">
                 <a:solidFill>
                   <a:srgbClr val="4B5563"/>
                 </a:solidFill>
-                <a:latin typeface="Aptos"/>
+                <a:latin typeface="Arial"/>
+                <a:ea typeface="Arial"/>
+                <a:cs typeface="Arial"/>
+                <a:sym typeface="Arial"/>
               </a:rPr>
               <a:t>• Start with a search goal or a specific role URL.</a:t>
             </a:r>
-          </a:p>
-          <a:p>
-            <a:pPr algn="l">
+            <a:endParaRPr/>
+          </a:p>
+          <a:p>
+            <a:pPr indent="0" lvl="0" marL="0" marR="0" rtl="0" algn="l">
+              <a:lnSpc>
+                <a:spcPct val="100000"/>
+              </a:lnSpc>
               <a:spcBef>
                 <a:spcPts val="700"/>
               </a:spcBef>
-              <a:defRPr sz="1400" b="0">
-                <a:solidFill>
-                  <a:srgbClr val="313944"/>
-                </a:solidFill>
-              </a:defRPr>
-            </a:pPr>
-            <a:r>
-              <a:rPr sz="1400" b="0">
+              <a:spcAft>
+                <a:spcPts val="0"/>
+              </a:spcAft>
+              <a:buNone/>
+            </a:pPr>
+            <a:r>
+              <a:t/>
+            </a:r>
+            <a:endParaRPr>
+              <a:solidFill>
+                <a:srgbClr val="4B5563"/>
+              </a:solidFill>
+            </a:endParaRPr>
+          </a:p>
+          <a:p>
+            <a:pPr indent="0" lvl="0" marL="0" marR="0" rtl="0" algn="l">
+              <a:lnSpc>
+                <a:spcPct val="100000"/>
+              </a:lnSpc>
+              <a:spcBef>
+                <a:spcPts val="700"/>
+              </a:spcBef>
+              <a:spcAft>
+                <a:spcPts val="0"/>
+              </a:spcAft>
+              <a:buNone/>
+            </a:pPr>
+            <a:r>
+              <a:rPr b="0" i="0" lang="en-US" sz="1400" u="none" cap="none" strike="noStrike">
                 <a:solidFill>
                   <a:srgbClr val="4B5563"/>
                 </a:solidFill>
-                <a:latin typeface="Aptos"/>
+                <a:latin typeface="Arial"/>
+                <a:ea typeface="Arial"/>
+                <a:cs typeface="Arial"/>
+                <a:sym typeface="Arial"/>
               </a:rPr>
               <a:t>• Verify official opening status before drafting.</a:t>
             </a:r>
-          </a:p>
-          <a:p>
-            <a:pPr algn="l">
+            <a:endParaRPr/>
+          </a:p>
+          <a:p>
+            <a:pPr indent="0" lvl="0" marL="0" marR="0" rtl="0" algn="l">
+              <a:lnSpc>
+                <a:spcPct val="100000"/>
+              </a:lnSpc>
               <a:spcBef>
                 <a:spcPts val="700"/>
               </a:spcBef>
-              <a:defRPr sz="1400" b="0">
-                <a:solidFill>
-                  <a:srgbClr val="313944"/>
-                </a:solidFill>
-              </a:defRPr>
-            </a:pPr>
-            <a:r>
-              <a:rPr sz="1400" b="0">
+              <a:spcAft>
+                <a:spcPts val="0"/>
+              </a:spcAft>
+              <a:buNone/>
+            </a:pPr>
+            <a:r>
+              <a:t/>
+            </a:r>
+            <a:endParaRPr>
+              <a:solidFill>
+                <a:srgbClr val="4B5563"/>
+              </a:solidFill>
+            </a:endParaRPr>
+          </a:p>
+          <a:p>
+            <a:pPr indent="0" lvl="0" marL="0" marR="0" rtl="0" algn="l">
+              <a:lnSpc>
+                <a:spcPct val="100000"/>
+              </a:lnSpc>
+              <a:spcBef>
+                <a:spcPts val="700"/>
+              </a:spcBef>
+              <a:spcAft>
+                <a:spcPts val="0"/>
+              </a:spcAft>
+              <a:buNone/>
+            </a:pPr>
+            <a:r>
+              <a:rPr b="0" i="0" lang="en-US" sz="1400" u="none" cap="none" strike="noStrike">
                 <a:solidFill>
                   <a:srgbClr val="4B5563"/>
                 </a:solidFill>
-                <a:latin typeface="Aptos"/>
+                <a:latin typeface="Arial"/>
+                <a:ea typeface="Arial"/>
+                <a:cs typeface="Arial"/>
+                <a:sym typeface="Arial"/>
               </a:rPr>
               <a:t>• Map JD requirements to DIRECT / TRANSFERABLE / UNKNOWN / UNMET.</a:t>
             </a:r>
-          </a:p>
-          <a:p>
-            <a:pPr algn="l">
+            <a:endParaRPr/>
+          </a:p>
+          <a:p>
+            <a:pPr indent="0" lvl="0" marL="0" marR="0" rtl="0" algn="l">
+              <a:lnSpc>
+                <a:spcPct val="100000"/>
+              </a:lnSpc>
               <a:spcBef>
                 <a:spcPts val="700"/>
               </a:spcBef>
-              <a:defRPr sz="1400" b="0">
-                <a:solidFill>
-                  <a:srgbClr val="313944"/>
-                </a:solidFill>
-              </a:defRPr>
-            </a:pPr>
-            <a:r>
-              <a:rPr sz="1400" b="0">
+              <a:spcAft>
+                <a:spcPts val="0"/>
+              </a:spcAft>
+              <a:buNone/>
+            </a:pPr>
+            <a:r>
+              <a:t/>
+            </a:r>
+            <a:endParaRPr>
+              <a:solidFill>
+                <a:srgbClr val="4B5563"/>
+              </a:solidFill>
+            </a:endParaRPr>
+          </a:p>
+          <a:p>
+            <a:pPr indent="0" lvl="0" marL="0" marR="0" rtl="0" algn="l">
+              <a:lnSpc>
+                <a:spcPct val="100000"/>
+              </a:lnSpc>
+              <a:spcBef>
+                <a:spcPts val="700"/>
+              </a:spcBef>
+              <a:spcAft>
+                <a:spcPts val="0"/>
+              </a:spcAft>
+              <a:buNone/>
+            </a:pPr>
+            <a:r>
+              <a:rPr b="0" i="0" lang="en-US" sz="1400" u="none" cap="none" strike="noStrike">
                 <a:solidFill>
                   <a:srgbClr val="4B5563"/>
                 </a:solidFill>
-                <a:latin typeface="Aptos"/>
+                <a:latin typeface="Arial"/>
+                <a:ea typeface="Arial"/>
+                <a:cs typeface="Arial"/>
+                <a:sym typeface="Arial"/>
               </a:rPr>
               <a:t>• Generate reviewable materials, then validate before release.</a:t>
             </a:r>
+            <a:endParaRPr b="0" i="0" sz="1400" u="none" cap="none" strike="noStrike">
+              <a:solidFill>
+                <a:srgbClr val="4B5563"/>
+              </a:solidFill>
+              <a:latin typeface="Arial"/>
+              <a:ea typeface="Arial"/>
+              <a:cs typeface="Arial"/>
+              <a:sym typeface="Arial"/>
+            </a:endParaRPr>
+          </a:p>
+          <a:p>
+            <a:pPr indent="0" lvl="0" marL="0" marR="0" rtl="0" algn="l">
+              <a:lnSpc>
+                <a:spcPct val="100000"/>
+              </a:lnSpc>
+              <a:spcBef>
+                <a:spcPts val="700"/>
+              </a:spcBef>
+              <a:spcAft>
+                <a:spcPts val="0"/>
+              </a:spcAft>
+              <a:buNone/>
+            </a:pPr>
+            <a:r>
+              <a:t/>
+            </a:r>
+            <a:endParaRPr>
+              <a:solidFill>
+                <a:srgbClr val="4B5563"/>
+              </a:solidFill>
+            </a:endParaRPr>
+          </a:p>
+          <a:p>
+            <a:pPr indent="0" lvl="0" marL="0" marR="0" rtl="0" algn="l">
+              <a:lnSpc>
+                <a:spcPct val="100000"/>
+              </a:lnSpc>
+              <a:spcBef>
+                <a:spcPts val="700"/>
+              </a:spcBef>
+              <a:spcAft>
+                <a:spcPts val="0"/>
+              </a:spcAft>
+              <a:buNone/>
+            </a:pPr>
+            <a:r>
+              <a:t/>
+            </a:r>
+            <a:endParaRPr>
+              <a:solidFill>
+                <a:srgbClr val="4B5563"/>
+              </a:solidFill>
+            </a:endParaRPr>
           </a:p>
         </p:txBody>
       </p:sp>
       <p:sp>
         <p:nvSpPr>
-          <p:cNvPr id="6" name="Rounded Rectangle 5"/>
+          <p:cNvPr id="111" name="Google Shape;111;p9"/>
           <p:cNvSpPr/>
           <p:nvPr/>
         </p:nvSpPr>
@@ -7731,78 +8931,94 @@
             <a:ext cx="4983480" cy="1024128"/>
           </a:xfrm>
           <a:prstGeom prst="roundRect">
-            <a:avLst/>
+            <a:avLst>
+              <a:gd fmla="val 16667" name="adj"/>
+            </a:avLst>
           </a:prstGeom>
           <a:solidFill>
             <a:srgbClr val="FFFFFF"/>
           </a:solidFill>
-          <a:ln w="25400">
+          <a:ln cap="flat" cmpd="sng" w="25400">
             <a:solidFill>
               <a:srgbClr val="15803D"/>
             </a:solidFill>
+            <a:prstDash val="solid"/>
+            <a:round/>
+            <a:headEnd len="sm" w="sm" type="none"/>
+            <a:tailEnd len="sm" w="sm" type="none"/>
           </a:ln>
+          <a:effectLst>
+            <a:outerShdw blurRad="40000" rotWithShape="0" dir="5400000" dist="23000">
+              <a:srgbClr val="000000">
+                <a:alpha val="34902"/>
+              </a:srgbClr>
+            </a:outerShdw>
+          </a:effectLst>
         </p:spPr>
-        <p:style>
-          <a:lnRef idx="1">
-            <a:schemeClr val="accent1"/>
-          </a:lnRef>
-          <a:fillRef idx="3">
-            <a:schemeClr val="accent1"/>
-          </a:fillRef>
-          <a:effectRef idx="2">
-            <a:schemeClr val="accent1"/>
-          </a:effectRef>
-          <a:fontRef idx="minor">
-            <a:schemeClr val="lt1"/>
-          </a:fontRef>
-        </p:style>
         <p:txBody>
-          <a:bodyPr rtlCol="0" anchor="ctr" lIns="146304" rIns="146304" tIns="109728" wrap="square" bIns="91440"/>
+          <a:bodyPr anchorCtr="0" anchor="ctr" bIns="91425" lIns="146300" spcFirstLastPara="1" rIns="146300" wrap="square" tIns="109725">
+            <a:noAutofit/>
+          </a:bodyPr>
           <a:lstStyle/>
           <a:p>
-            <a:pPr algn="l">
-              <a:defRPr sz="1800" b="1">
-                <a:solidFill>
-                  <a:srgbClr val="DC2626"/>
-                </a:solidFill>
-              </a:defRPr>
-            </a:pPr>
-            <a:r>
-              <a:rPr b="1" sz="1800">
+            <a:pPr indent="0" lvl="0" marL="0" marR="0" rtl="0" algn="l">
+              <a:lnSpc>
+                <a:spcPct val="100000"/>
+              </a:lnSpc>
+              <a:spcBef>
+                <a:spcPts val="0"/>
+              </a:spcBef>
+              <a:spcAft>
+                <a:spcPts val="0"/>
+              </a:spcAft>
+              <a:buNone/>
+            </a:pPr>
+            <a:r>
+              <a:rPr b="1" i="0" lang="en-US" sz="1800" u="none" cap="none" strike="noStrike">
                 <a:solidFill>
                   <a:srgbClr val="111827"/>
                 </a:solidFill>
-                <a:latin typeface="Aptos"/>
+                <a:latin typeface="Arial"/>
+                <a:ea typeface="Arial"/>
+                <a:cs typeface="Arial"/>
+                <a:sym typeface="Arial"/>
               </a:rPr>
               <a:t>Mechanical validation</a:t>
             </a:r>
-          </a:p>
-          <a:p>
-            <a:pPr algn="l">
+            <a:endParaRPr/>
+          </a:p>
+          <a:p>
+            <a:pPr indent="0" lvl="0" marL="0" marR="0" rtl="0" algn="l">
+              <a:lnSpc>
+                <a:spcPct val="100000"/>
+              </a:lnSpc>
               <a:spcBef>
                 <a:spcPts val="500"/>
               </a:spcBef>
-              <a:defRPr sz="1400" b="0">
-                <a:solidFill>
-                  <a:srgbClr val="313944"/>
-                </a:solidFill>
-              </a:defRPr>
-            </a:pPr>
-            <a:r>
-              <a:rPr sz="1400" b="0">
+              <a:spcAft>
+                <a:spcPts val="0"/>
+              </a:spcAft>
+              <a:buNone/>
+            </a:pPr>
+            <a:r>
+              <a:rPr b="0" i="0" lang="en-US" sz="1400" u="none" cap="none" strike="noStrike">
                 <a:solidFill>
                   <a:srgbClr val="4B5563"/>
                 </a:solidFill>
-                <a:latin typeface="Aptos"/>
+                <a:latin typeface="Arial"/>
+                <a:ea typeface="Arial"/>
+                <a:cs typeface="Arial"/>
+                <a:sym typeface="Arial"/>
               </a:rPr>
               <a:t>Schemas, required files, private-file guardrails, hyperlinks, and state-history merge behavior.</a:t>
             </a:r>
+            <a:endParaRPr/>
           </a:p>
         </p:txBody>
       </p:sp>
       <p:sp>
         <p:nvSpPr>
-          <p:cNvPr id="7" name="Rounded Rectangle 6"/>
+          <p:cNvPr id="112" name="Google Shape;112;p9"/>
           <p:cNvSpPr/>
           <p:nvPr/>
         </p:nvSpPr>
@@ -7812,78 +9028,94 @@
             <a:ext cx="4983480" cy="1024128"/>
           </a:xfrm>
           <a:prstGeom prst="roundRect">
-            <a:avLst/>
+            <a:avLst>
+              <a:gd fmla="val 16667" name="adj"/>
+            </a:avLst>
           </a:prstGeom>
           <a:solidFill>
             <a:srgbClr val="FFFFFF"/>
           </a:solidFill>
-          <a:ln w="25400">
+          <a:ln cap="flat" cmpd="sng" w="25400">
             <a:solidFill>
               <a:srgbClr val="2563EB"/>
             </a:solidFill>
+            <a:prstDash val="solid"/>
+            <a:round/>
+            <a:headEnd len="sm" w="sm" type="none"/>
+            <a:tailEnd len="sm" w="sm" type="none"/>
           </a:ln>
+          <a:effectLst>
+            <a:outerShdw blurRad="40000" rotWithShape="0" dir="5400000" dist="23000">
+              <a:srgbClr val="000000">
+                <a:alpha val="34902"/>
+              </a:srgbClr>
+            </a:outerShdw>
+          </a:effectLst>
         </p:spPr>
-        <p:style>
-          <a:lnRef idx="1">
-            <a:schemeClr val="accent1"/>
-          </a:lnRef>
-          <a:fillRef idx="3">
-            <a:schemeClr val="accent1"/>
-          </a:fillRef>
-          <a:effectRef idx="2">
-            <a:schemeClr val="accent1"/>
-          </a:effectRef>
-          <a:fontRef idx="minor">
-            <a:schemeClr val="lt1"/>
-          </a:fontRef>
-        </p:style>
         <p:txBody>
-          <a:bodyPr rtlCol="0" anchor="ctr" lIns="146304" rIns="146304" tIns="109728" wrap="square" bIns="91440"/>
+          <a:bodyPr anchorCtr="0" anchor="ctr" bIns="91425" lIns="146300" spcFirstLastPara="1" rIns="146300" wrap="square" tIns="109725">
+            <a:noAutofit/>
+          </a:bodyPr>
           <a:lstStyle/>
           <a:p>
-            <a:pPr algn="l">
-              <a:defRPr sz="1800" b="1">
-                <a:solidFill>
-                  <a:srgbClr val="EA580C"/>
-                </a:solidFill>
-              </a:defRPr>
-            </a:pPr>
-            <a:r>
-              <a:rPr b="1" sz="1800">
+            <a:pPr indent="0" lvl="0" marL="0" marR="0" rtl="0" algn="l">
+              <a:lnSpc>
+                <a:spcPct val="100000"/>
+              </a:lnSpc>
+              <a:spcBef>
+                <a:spcPts val="0"/>
+              </a:spcBef>
+              <a:spcAft>
+                <a:spcPts val="0"/>
+              </a:spcAft>
+              <a:buNone/>
+            </a:pPr>
+            <a:r>
+              <a:rPr b="1" i="0" lang="en-US" sz="1800" u="none" cap="none" strike="noStrike">
                 <a:solidFill>
                   <a:srgbClr val="111827"/>
                 </a:solidFill>
-                <a:latin typeface="Aptos"/>
+                <a:latin typeface="Arial"/>
+                <a:ea typeface="Arial"/>
+                <a:cs typeface="Arial"/>
+                <a:sym typeface="Arial"/>
               </a:rPr>
               <a:t>Grounding validation</a:t>
             </a:r>
-          </a:p>
-          <a:p>
-            <a:pPr algn="l">
+            <a:endParaRPr/>
+          </a:p>
+          <a:p>
+            <a:pPr indent="0" lvl="0" marL="0" marR="0" rtl="0" algn="l">
+              <a:lnSpc>
+                <a:spcPct val="100000"/>
+              </a:lnSpc>
               <a:spcBef>
                 <a:spcPts val="500"/>
               </a:spcBef>
-              <a:defRPr sz="1400" b="0">
-                <a:solidFill>
-                  <a:srgbClr val="313944"/>
-                </a:solidFill>
-              </a:defRPr>
-            </a:pPr>
-            <a:r>
-              <a:rPr sz="1400" b="0">
+              <a:spcAft>
+                <a:spcPts val="0"/>
+              </a:spcAft>
+              <a:buNone/>
+            </a:pPr>
+            <a:r>
+              <a:rPr b="0" i="0" lang="en-US" sz="1400" u="none" cap="none" strike="noStrike">
                 <a:solidFill>
                   <a:srgbClr val="4B5563"/>
                 </a:solidFill>
-                <a:latin typeface="Aptos"/>
+                <a:latin typeface="Arial"/>
+                <a:ea typeface="Arial"/>
+                <a:cs typeface="Arial"/>
+                <a:sym typeface="Arial"/>
               </a:rPr>
               <a:t>Evidence IDs must exist; unknown or unmet requirements cannot become candidate claims.</a:t>
             </a:r>
+            <a:endParaRPr/>
           </a:p>
         </p:txBody>
       </p:sp>
       <p:sp>
         <p:nvSpPr>
-          <p:cNvPr id="8" name="Rounded Rectangle 7"/>
+          <p:cNvPr id="113" name="Google Shape;113;p9"/>
           <p:cNvSpPr/>
           <p:nvPr/>
         </p:nvSpPr>
@@ -7893,78 +9125,94 @@
             <a:ext cx="4983480" cy="1024128"/>
           </a:xfrm>
           <a:prstGeom prst="roundRect">
-            <a:avLst/>
+            <a:avLst>
+              <a:gd fmla="val 16667" name="adj"/>
+            </a:avLst>
           </a:prstGeom>
           <a:solidFill>
             <a:srgbClr val="FFFFFF"/>
           </a:solidFill>
-          <a:ln w="25400">
+          <a:ln cap="flat" cmpd="sng" w="25400">
             <a:solidFill>
               <a:srgbClr val="7C3AED"/>
             </a:solidFill>
+            <a:prstDash val="solid"/>
+            <a:round/>
+            <a:headEnd len="sm" w="sm" type="none"/>
+            <a:tailEnd len="sm" w="sm" type="none"/>
           </a:ln>
+          <a:effectLst>
+            <a:outerShdw blurRad="40000" rotWithShape="0" dir="5400000" dist="23000">
+              <a:srgbClr val="000000">
+                <a:alpha val="34902"/>
+              </a:srgbClr>
+            </a:outerShdw>
+          </a:effectLst>
         </p:spPr>
-        <p:style>
-          <a:lnRef idx="1">
-            <a:schemeClr val="accent1"/>
-          </a:lnRef>
-          <a:fillRef idx="3">
-            <a:schemeClr val="accent1"/>
-          </a:fillRef>
-          <a:effectRef idx="2">
-            <a:schemeClr val="accent1"/>
-          </a:effectRef>
-          <a:fontRef idx="minor">
-            <a:schemeClr val="lt1"/>
-          </a:fontRef>
-        </p:style>
         <p:txBody>
-          <a:bodyPr rtlCol="0" anchor="ctr" lIns="146304" rIns="146304" tIns="109728" wrap="square" bIns="91440"/>
+          <a:bodyPr anchorCtr="0" anchor="ctr" bIns="91425" lIns="146300" spcFirstLastPara="1" rIns="146300" wrap="square" tIns="109725">
+            <a:noAutofit/>
+          </a:bodyPr>
           <a:lstStyle/>
           <a:p>
-            <a:pPr algn="l">
-              <a:defRPr sz="1800" b="1">
-                <a:solidFill>
-                  <a:srgbClr val="7C3AED"/>
-                </a:solidFill>
-              </a:defRPr>
-            </a:pPr>
-            <a:r>
-              <a:rPr b="1" sz="1800">
+            <a:pPr indent="0" lvl="0" marL="0" marR="0" rtl="0" algn="l">
+              <a:lnSpc>
+                <a:spcPct val="100000"/>
+              </a:lnSpc>
+              <a:spcBef>
+                <a:spcPts val="0"/>
+              </a:spcBef>
+              <a:spcAft>
+                <a:spcPts val="0"/>
+              </a:spcAft>
+              <a:buNone/>
+            </a:pPr>
+            <a:r>
+              <a:rPr b="1" i="0" lang="en-US" sz="1800" u="none" cap="none" strike="noStrike">
                 <a:solidFill>
                   <a:srgbClr val="111827"/>
                 </a:solidFill>
-                <a:latin typeface="Aptos"/>
+                <a:latin typeface="Arial"/>
+                <a:ea typeface="Arial"/>
+                <a:cs typeface="Arial"/>
+                <a:sym typeface="Arial"/>
               </a:rPr>
               <a:t>Human/semantic review</a:t>
             </a:r>
-          </a:p>
-          <a:p>
-            <a:pPr algn="l">
+            <a:endParaRPr/>
+          </a:p>
+          <a:p>
+            <a:pPr indent="0" lvl="0" marL="0" marR="0" rtl="0" algn="l">
+              <a:lnSpc>
+                <a:spcPct val="100000"/>
+              </a:lnSpc>
               <a:spcBef>
                 <a:spcPts val="500"/>
               </a:spcBef>
-              <a:defRPr sz="1400" b="0">
-                <a:solidFill>
-                  <a:srgbClr val="313944"/>
-                </a:solidFill>
-              </a:defRPr>
-            </a:pPr>
-            <a:r>
-              <a:rPr sz="1400" b="0">
+              <a:spcAft>
+                <a:spcPts val="0"/>
+              </a:spcAft>
+              <a:buNone/>
+            </a:pPr>
+            <a:r>
+              <a:rPr b="0" i="0" lang="en-US" sz="1400" u="none" cap="none" strike="noStrike">
                 <a:solidFill>
                   <a:srgbClr val="4B5563"/>
                 </a:solidFill>
-                <a:latin typeface="Aptos"/>
+                <a:latin typeface="Arial"/>
+                <a:ea typeface="Arial"/>
+                <a:cs typeface="Arial"/>
+                <a:sym typeface="Arial"/>
               </a:rPr>
               <a:t>A reviewer checks relevance, scope, tone, and whether the output is ready to submit.</a:t>
             </a:r>
+            <a:endParaRPr/>
           </a:p>
         </p:txBody>
       </p:sp>
       <p:sp>
         <p:nvSpPr>
-          <p:cNvPr id="9" name="TextBox 8"/>
+          <p:cNvPr id="114" name="Google Shape;114;p9"/>
           <p:cNvSpPr txBox="1"/>
           <p:nvPr/>
         </p:nvSpPr>
@@ -7979,27 +9227,47 @@
           <a:solidFill>
             <a:srgbClr val="F0F7F3"/>
           </a:solidFill>
-          <a:ln w="19050">
+          <a:ln cap="flat" cmpd="sng" w="19050">
             <a:solidFill>
               <a:srgbClr val="15803D"/>
             </a:solidFill>
+            <a:prstDash val="solid"/>
+            <a:round/>
+            <a:headEnd len="sm" w="sm" type="none"/>
+            <a:tailEnd len="sm" w="sm" type="none"/>
           </a:ln>
         </p:spPr>
         <p:txBody>
-          <a:bodyPr wrap="square">
+          <a:bodyPr anchorCtr="0" anchor="t" bIns="45700" lIns="91425" spcFirstLastPara="1" rIns="91425" wrap="square" tIns="45700">
             <a:spAutoFit/>
           </a:bodyPr>
           <a:lstStyle/>
           <a:p>
-            <a:pPr algn="ctr"/>
-            <a:r>
-              <a:rPr sz="1400" b="1">
+            <a:pPr indent="0" lvl="0" marL="0" marR="0" rtl="0" algn="ctr">
+              <a:lnSpc>
+                <a:spcPct val="100000"/>
+              </a:lnSpc>
+              <a:spcBef>
+                <a:spcPts val="0"/>
+              </a:spcBef>
+              <a:spcAft>
+                <a:spcPts val="0"/>
+              </a:spcAft>
+              <a:buNone/>
+            </a:pPr>
+            <a:r>
+              <a:rPr b="1" i="0" lang="en-US" sz="1400" u="none" cap="none" strike="noStrike">
                 <a:solidFill>
                   <a:srgbClr val="111827"/>
                 </a:solidFill>
+                <a:latin typeface="Arial"/>
+                <a:ea typeface="Arial"/>
+                <a:cs typeface="Arial"/>
+                <a:sym typeface="Arial"/>
               </a:rPr>
               <a:t>Release gate: python scripts/release_gate.py</a:t>
             </a:r>
+            <a:endParaRPr/>
           </a:p>
         </p:txBody>
       </p:sp>
